--- a/АИС/практики/АИС Практика 10.pptx
+++ b/АИС/практики/АИС Практика 10.pptx
@@ -7,6 +7,12 @@
   <p:sldIdLst>
     <p:sldId id="256" r:id="rId2"/>
     <p:sldId id="257" r:id="rId3"/>
+    <p:sldId id="258" r:id="rId4"/>
+    <p:sldId id="260" r:id="rId5"/>
+    <p:sldId id="261" r:id="rId6"/>
+    <p:sldId id="259" r:id="rId7"/>
+    <p:sldId id="262" r:id="rId8"/>
+    <p:sldId id="263" r:id="rId9"/>
   </p:sldIdLst>
   <p:sldSz cx="12192000" cy="6858000"/>
   <p:notesSz cx="6858000" cy="9144000"/>
@@ -107,7 +113,18 @@
   </p:defaultTextStyle>
   <p:extLst>
     <p:ext uri="{EFAFB233-063F-42B5-8137-9DF3F51BA10A}">
-      <p15:sldGuideLst xmlns="" xmlns:p15="http://schemas.microsoft.com/office/powerpoint/2012/main"/>
+      <p15:sldGuideLst xmlns:p15="http://schemas.microsoft.com/office/powerpoint/2012/main">
+        <p15:guide id="1" orient="horz" pos="2160">
+          <p15:clr>
+            <a:srgbClr val="A4A3A4"/>
+          </p15:clr>
+        </p15:guide>
+        <p15:guide id="2" pos="3840">
+          <p15:clr>
+            <a:srgbClr val="A4A3A4"/>
+          </p15:clr>
+        </p15:guide>
+      </p15:sldGuideLst>
     </p:ext>
   </p:extLst>
 </p:presentation>
@@ -245,7 +262,7 @@
             <a:fld id="{6AFCBDAD-76C0-41F5-AA29-B53D4D5844DF}" type="datetimeFigureOut">
               <a:rPr lang="ru-RU" smtClean="0"/>
               <a:pPr/>
-              <a:t>19.10.2026</a:t>
+              <a:t>23.10.2026</a:t>
             </a:fld>
             <a:endParaRPr lang="ru-RU"/>
           </a:p>
@@ -297,7 +314,7 @@
     </p:spTree>
     <p:extLst>
       <p:ext uri="{BB962C8B-B14F-4D97-AF65-F5344CB8AC3E}">
-        <p14:creationId xmlns="" xmlns:p14="http://schemas.microsoft.com/office/powerpoint/2010/main" val="2009099700"/>
+        <p14:creationId xmlns:p14="http://schemas.microsoft.com/office/powerpoint/2010/main" val="2009099700"/>
       </p:ext>
     </p:extLst>
   </p:cSld>
@@ -417,7 +434,7 @@
             <a:fld id="{6AFCBDAD-76C0-41F5-AA29-B53D4D5844DF}" type="datetimeFigureOut">
               <a:rPr lang="ru-RU" smtClean="0"/>
               <a:pPr/>
-              <a:t>19.10.2026</a:t>
+              <a:t>23.10.2026</a:t>
             </a:fld>
             <a:endParaRPr lang="ru-RU"/>
           </a:p>
@@ -469,7 +486,7 @@
     </p:spTree>
     <p:extLst>
       <p:ext uri="{BB962C8B-B14F-4D97-AF65-F5344CB8AC3E}">
-        <p14:creationId xmlns="" xmlns:p14="http://schemas.microsoft.com/office/powerpoint/2010/main" val="728714344"/>
+        <p14:creationId xmlns:p14="http://schemas.microsoft.com/office/powerpoint/2010/main" val="728714344"/>
       </p:ext>
     </p:extLst>
   </p:cSld>
@@ -599,7 +616,7 @@
             <a:fld id="{6AFCBDAD-76C0-41F5-AA29-B53D4D5844DF}" type="datetimeFigureOut">
               <a:rPr lang="ru-RU" smtClean="0"/>
               <a:pPr/>
-              <a:t>19.10.2026</a:t>
+              <a:t>23.10.2026</a:t>
             </a:fld>
             <a:endParaRPr lang="ru-RU"/>
           </a:p>
@@ -651,7 +668,7 @@
     </p:spTree>
     <p:extLst>
       <p:ext uri="{BB962C8B-B14F-4D97-AF65-F5344CB8AC3E}">
-        <p14:creationId xmlns="" xmlns:p14="http://schemas.microsoft.com/office/powerpoint/2010/main" val="959090948"/>
+        <p14:creationId xmlns:p14="http://schemas.microsoft.com/office/powerpoint/2010/main" val="959090948"/>
       </p:ext>
     </p:extLst>
   </p:cSld>
@@ -771,7 +788,7 @@
             <a:fld id="{6AFCBDAD-76C0-41F5-AA29-B53D4D5844DF}" type="datetimeFigureOut">
               <a:rPr lang="ru-RU" smtClean="0"/>
               <a:pPr/>
-              <a:t>19.10.2026</a:t>
+              <a:t>23.10.2026</a:t>
             </a:fld>
             <a:endParaRPr lang="ru-RU"/>
           </a:p>
@@ -823,7 +840,7 @@
     </p:spTree>
     <p:extLst>
       <p:ext uri="{BB962C8B-B14F-4D97-AF65-F5344CB8AC3E}">
-        <p14:creationId xmlns="" xmlns:p14="http://schemas.microsoft.com/office/powerpoint/2010/main" val="767577504"/>
+        <p14:creationId xmlns:p14="http://schemas.microsoft.com/office/powerpoint/2010/main" val="767577504"/>
       </p:ext>
     </p:extLst>
   </p:cSld>
@@ -1019,7 +1036,7 @@
             <a:fld id="{6AFCBDAD-76C0-41F5-AA29-B53D4D5844DF}" type="datetimeFigureOut">
               <a:rPr lang="ru-RU" smtClean="0"/>
               <a:pPr/>
-              <a:t>19.10.2026</a:t>
+              <a:t>23.10.2026</a:t>
             </a:fld>
             <a:endParaRPr lang="ru-RU"/>
           </a:p>
@@ -1071,7 +1088,7 @@
     </p:spTree>
     <p:extLst>
       <p:ext uri="{BB962C8B-B14F-4D97-AF65-F5344CB8AC3E}">
-        <p14:creationId xmlns="" xmlns:p14="http://schemas.microsoft.com/office/powerpoint/2010/main" val="3466347405"/>
+        <p14:creationId xmlns:p14="http://schemas.microsoft.com/office/powerpoint/2010/main" val="3466347405"/>
       </p:ext>
     </p:extLst>
   </p:cSld>
@@ -1253,7 +1270,7 @@
             <a:fld id="{6AFCBDAD-76C0-41F5-AA29-B53D4D5844DF}" type="datetimeFigureOut">
               <a:rPr lang="ru-RU" smtClean="0"/>
               <a:pPr/>
-              <a:t>19.10.2026</a:t>
+              <a:t>23.10.2026</a:t>
             </a:fld>
             <a:endParaRPr lang="ru-RU"/>
           </a:p>
@@ -1305,7 +1322,7 @@
     </p:spTree>
     <p:extLst>
       <p:ext uri="{BB962C8B-B14F-4D97-AF65-F5344CB8AC3E}">
-        <p14:creationId xmlns="" xmlns:p14="http://schemas.microsoft.com/office/powerpoint/2010/main" val="2905535855"/>
+        <p14:creationId xmlns:p14="http://schemas.microsoft.com/office/powerpoint/2010/main" val="2905535855"/>
       </p:ext>
     </p:extLst>
   </p:cSld>
@@ -1622,7 +1639,7 @@
             <a:fld id="{6AFCBDAD-76C0-41F5-AA29-B53D4D5844DF}" type="datetimeFigureOut">
               <a:rPr lang="ru-RU" smtClean="0"/>
               <a:pPr/>
-              <a:t>19.10.2026</a:t>
+              <a:t>23.10.2026</a:t>
             </a:fld>
             <a:endParaRPr lang="ru-RU"/>
           </a:p>
@@ -1674,7 +1691,7 @@
     </p:spTree>
     <p:extLst>
       <p:ext uri="{BB962C8B-B14F-4D97-AF65-F5344CB8AC3E}">
-        <p14:creationId xmlns="" xmlns:p14="http://schemas.microsoft.com/office/powerpoint/2010/main" val="505724553"/>
+        <p14:creationId xmlns:p14="http://schemas.microsoft.com/office/powerpoint/2010/main" val="505724553"/>
       </p:ext>
     </p:extLst>
   </p:cSld>
@@ -1742,7 +1759,7 @@
             <a:fld id="{6AFCBDAD-76C0-41F5-AA29-B53D4D5844DF}" type="datetimeFigureOut">
               <a:rPr lang="ru-RU" smtClean="0"/>
               <a:pPr/>
-              <a:t>19.10.2026</a:t>
+              <a:t>23.10.2026</a:t>
             </a:fld>
             <a:endParaRPr lang="ru-RU"/>
           </a:p>
@@ -1794,7 +1811,7 @@
     </p:spTree>
     <p:extLst>
       <p:ext uri="{BB962C8B-B14F-4D97-AF65-F5344CB8AC3E}">
-        <p14:creationId xmlns="" xmlns:p14="http://schemas.microsoft.com/office/powerpoint/2010/main" val="227942086"/>
+        <p14:creationId xmlns:p14="http://schemas.microsoft.com/office/powerpoint/2010/main" val="227942086"/>
       </p:ext>
     </p:extLst>
   </p:cSld>
@@ -1839,7 +1856,7 @@
             <a:fld id="{6AFCBDAD-76C0-41F5-AA29-B53D4D5844DF}" type="datetimeFigureOut">
               <a:rPr lang="ru-RU" smtClean="0"/>
               <a:pPr/>
-              <a:t>19.10.2026</a:t>
+              <a:t>23.10.2026</a:t>
             </a:fld>
             <a:endParaRPr lang="ru-RU"/>
           </a:p>
@@ -1891,7 +1908,7 @@
     </p:spTree>
     <p:extLst>
       <p:ext uri="{BB962C8B-B14F-4D97-AF65-F5344CB8AC3E}">
-        <p14:creationId xmlns="" xmlns:p14="http://schemas.microsoft.com/office/powerpoint/2010/main" val="3561464786"/>
+        <p14:creationId xmlns:p14="http://schemas.microsoft.com/office/powerpoint/2010/main" val="3561464786"/>
       </p:ext>
     </p:extLst>
   </p:cSld>
@@ -2118,7 +2135,7 @@
             <a:fld id="{6AFCBDAD-76C0-41F5-AA29-B53D4D5844DF}" type="datetimeFigureOut">
               <a:rPr lang="ru-RU" smtClean="0"/>
               <a:pPr/>
-              <a:t>19.10.2026</a:t>
+              <a:t>23.10.2026</a:t>
             </a:fld>
             <a:endParaRPr lang="ru-RU"/>
           </a:p>
@@ -2170,7 +2187,7 @@
     </p:spTree>
     <p:extLst>
       <p:ext uri="{BB962C8B-B14F-4D97-AF65-F5344CB8AC3E}">
-        <p14:creationId xmlns="" xmlns:p14="http://schemas.microsoft.com/office/powerpoint/2010/main" val="4021756725"/>
+        <p14:creationId xmlns:p14="http://schemas.microsoft.com/office/powerpoint/2010/main" val="4021756725"/>
       </p:ext>
     </p:extLst>
   </p:cSld>
@@ -2373,7 +2390,7 @@
             <a:fld id="{6AFCBDAD-76C0-41F5-AA29-B53D4D5844DF}" type="datetimeFigureOut">
               <a:rPr lang="ru-RU" smtClean="0"/>
               <a:pPr/>
-              <a:t>19.10.2026</a:t>
+              <a:t>23.10.2026</a:t>
             </a:fld>
             <a:endParaRPr lang="ru-RU"/>
           </a:p>
@@ -2425,7 +2442,7 @@
     </p:spTree>
     <p:extLst>
       <p:ext uri="{BB962C8B-B14F-4D97-AF65-F5344CB8AC3E}">
-        <p14:creationId xmlns="" xmlns:p14="http://schemas.microsoft.com/office/powerpoint/2010/main" val="2497390583"/>
+        <p14:creationId xmlns:p14="http://schemas.microsoft.com/office/powerpoint/2010/main" val="2497390583"/>
       </p:ext>
     </p:extLst>
   </p:cSld>
@@ -2588,7 +2605,7 @@
             <a:fld id="{6AFCBDAD-76C0-41F5-AA29-B53D4D5844DF}" type="datetimeFigureOut">
               <a:rPr lang="ru-RU" smtClean="0"/>
               <a:pPr/>
-              <a:t>19.10.2026</a:t>
+              <a:t>23.10.2026</a:t>
             </a:fld>
             <a:endParaRPr lang="ru-RU"/>
           </a:p>
@@ -2676,7 +2693,7 @@
     </p:spTree>
     <p:extLst>
       <p:ext uri="{BB962C8B-B14F-4D97-AF65-F5344CB8AC3E}">
-        <p14:creationId xmlns="" xmlns:p14="http://schemas.microsoft.com/office/powerpoint/2010/main" val="2528307424"/>
+        <p14:creationId xmlns:p14="http://schemas.microsoft.com/office/powerpoint/2010/main" val="2528307424"/>
       </p:ext>
     </p:extLst>
   </p:cSld>
@@ -3013,11 +3030,7 @@
           <a:p>
             <a:r>
               <a:rPr lang="ru-RU" b="1" dirty="0" smtClean="0"/>
-              <a:t>Сетевая связность и </a:t>
-            </a:r>
-            <a:r>
-              <a:rPr lang="ru-RU" b="1" dirty="0" smtClean="0"/>
-              <a:t>приватность</a:t>
+              <a:t>Сетевая связность и приватность</a:t>
             </a:r>
             <a:r>
               <a:rPr lang="en-US" b="1" dirty="0" smtClean="0"/>
@@ -3038,7 +3051,7 @@
     </p:spTree>
     <p:extLst>
       <p:ext uri="{BB962C8B-B14F-4D97-AF65-F5344CB8AC3E}">
-        <p14:creationId xmlns="" xmlns:p14="http://schemas.microsoft.com/office/powerpoint/2010/main" val="3674977980"/>
+        <p14:creationId xmlns:p14="http://schemas.microsoft.com/office/powerpoint/2010/main" val="3674977980"/>
       </p:ext>
     </p:extLst>
   </p:cSld>
@@ -3074,7 +3087,7 @@
         <p:spPr>
           <a:xfrm>
             <a:off x="0" y="0"/>
-            <a:ext cx="12192000" cy="6555641"/>
+            <a:ext cx="12192000" cy="3908762"/>
           </a:xfrm>
           <a:prstGeom prst="rect">
             <a:avLst/>
@@ -3088,598 +3101,2374 @@
           <a:p>
             <a:pPr algn="ctr"/>
             <a:r>
-              <a:rPr lang="ru-RU" sz="1500" b="1" dirty="0" smtClean="0">
-                <a:latin typeface="Times New Roman" pitchFamily="18" charset="0"/>
-                <a:cs typeface="Times New Roman" pitchFamily="18" charset="0"/>
-              </a:rPr>
-              <a:t>В чём смысл задания</a:t>
-            </a:r>
-          </a:p>
-          <a:p>
-            <a:pPr algn="just"/>
-            <a:r>
-              <a:rPr lang="ru-RU" sz="1500" dirty="0" smtClean="0">
-                <a:latin typeface="Times New Roman" pitchFamily="18" charset="0"/>
-                <a:cs typeface="Times New Roman" pitchFamily="18" charset="0"/>
-              </a:rPr>
-              <a:t>Вы создаёте </a:t>
-            </a:r>
-            <a:r>
-              <a:rPr lang="ru-RU" sz="1500" dirty="0" smtClean="0">
-                <a:latin typeface="Times New Roman" pitchFamily="18" charset="0"/>
-                <a:cs typeface="Times New Roman" pitchFamily="18" charset="0"/>
-              </a:rPr>
-              <a:t>ситуацию, когда внутри сети (в офисе) есть сервер с «личным» адресом, который никому снаружи не виден, но при этом люди из интернета должны к нему попадать. Роутер выступает переводчиком: он заранее знает правило — «если кто-то стучится на внешний адрес 203.0.113.10, отдай этот запрос на внутренний сервер 192.168.1.10».</a:t>
-            </a:r>
-          </a:p>
-          <a:p>
-            <a:pPr algn="just"/>
-            <a:r>
-              <a:rPr lang="ru-RU" sz="1500" dirty="0" smtClean="0">
-                <a:latin typeface="Times New Roman" pitchFamily="18" charset="0"/>
-                <a:cs typeface="Times New Roman" pitchFamily="18" charset="0"/>
-              </a:rPr>
-              <a:t>В шагах задания </a:t>
-            </a:r>
-            <a:r>
-              <a:rPr lang="ru-RU" sz="1500" dirty="0" smtClean="0">
-                <a:latin typeface="Times New Roman" pitchFamily="18" charset="0"/>
-                <a:cs typeface="Times New Roman" pitchFamily="18" charset="0"/>
-              </a:rPr>
-              <a:t>вы буквально прописываете </a:t>
-            </a:r>
-            <a:r>
-              <a:rPr lang="ru-RU" sz="1500" dirty="0" smtClean="0">
-                <a:latin typeface="Times New Roman" pitchFamily="18" charset="0"/>
-                <a:cs typeface="Times New Roman" pitchFamily="18" charset="0"/>
-              </a:rPr>
-              <a:t>это правило и </a:t>
-            </a:r>
-            <a:r>
-              <a:rPr lang="ru-RU" sz="1500" dirty="0" smtClean="0">
-                <a:latin typeface="Times New Roman" pitchFamily="18" charset="0"/>
-                <a:cs typeface="Times New Roman" pitchFamily="18" charset="0"/>
-              </a:rPr>
-              <a:t>помечаете </a:t>
-            </a:r>
-            <a:r>
-              <a:rPr lang="ru-RU" sz="1500" dirty="0" smtClean="0">
-                <a:latin typeface="Times New Roman" pitchFamily="18" charset="0"/>
-                <a:cs typeface="Times New Roman" pitchFamily="18" charset="0"/>
-              </a:rPr>
-              <a:t>интерфейсы:</a:t>
-            </a:r>
-          </a:p>
-          <a:p>
-            <a:pPr algn="just"/>
-            <a:r>
-              <a:rPr lang="ru-RU" sz="1500" dirty="0" smtClean="0">
-                <a:latin typeface="Times New Roman" pitchFamily="18" charset="0"/>
-                <a:cs typeface="Times New Roman" pitchFamily="18" charset="0"/>
-              </a:rPr>
-              <a:t>    </a:t>
-            </a:r>
-            <a:r>
-              <a:rPr lang="ru-RU" sz="1500" dirty="0" err="1" smtClean="0">
-                <a:latin typeface="Times New Roman" pitchFamily="18" charset="0"/>
-                <a:cs typeface="Times New Roman" pitchFamily="18" charset="0"/>
-              </a:rPr>
-              <a:t>ip</a:t>
-            </a:r>
-            <a:r>
-              <a:rPr lang="ru-RU" sz="1500" dirty="0" smtClean="0">
-                <a:latin typeface="Times New Roman" pitchFamily="18" charset="0"/>
-                <a:cs typeface="Times New Roman" pitchFamily="18" charset="0"/>
-              </a:rPr>
-              <a:t> </a:t>
-            </a:r>
-            <a:r>
-              <a:rPr lang="ru-RU" sz="1500" dirty="0" err="1" smtClean="0">
-                <a:latin typeface="Times New Roman" pitchFamily="18" charset="0"/>
-                <a:cs typeface="Times New Roman" pitchFamily="18" charset="0"/>
-              </a:rPr>
-              <a:t>nat</a:t>
-            </a:r>
-            <a:r>
-              <a:rPr lang="ru-RU" sz="1500" dirty="0" smtClean="0">
-                <a:latin typeface="Times New Roman" pitchFamily="18" charset="0"/>
-                <a:cs typeface="Times New Roman" pitchFamily="18" charset="0"/>
-              </a:rPr>
-              <a:t> </a:t>
-            </a:r>
-            <a:r>
-              <a:rPr lang="ru-RU" sz="1500" dirty="0" err="1" smtClean="0">
-                <a:latin typeface="Times New Roman" pitchFamily="18" charset="0"/>
-                <a:cs typeface="Times New Roman" pitchFamily="18" charset="0"/>
-              </a:rPr>
-              <a:t>inside</a:t>
-            </a:r>
-            <a:r>
-              <a:rPr lang="ru-RU" sz="1500" dirty="0" smtClean="0">
-                <a:latin typeface="Times New Roman" pitchFamily="18" charset="0"/>
-                <a:cs typeface="Times New Roman" pitchFamily="18" charset="0"/>
-              </a:rPr>
-              <a:t> — это «наша сеть, тут адреса приватные».</a:t>
-            </a:r>
-          </a:p>
-          <a:p>
-            <a:pPr algn="just"/>
-            <a:r>
-              <a:rPr lang="ru-RU" sz="1500" dirty="0" smtClean="0">
-                <a:latin typeface="Times New Roman" pitchFamily="18" charset="0"/>
-                <a:cs typeface="Times New Roman" pitchFamily="18" charset="0"/>
-              </a:rPr>
-              <a:t>    </a:t>
-            </a:r>
-            <a:r>
-              <a:rPr lang="ru-RU" sz="1500" dirty="0" err="1" smtClean="0">
-                <a:latin typeface="Times New Roman" pitchFamily="18" charset="0"/>
-                <a:cs typeface="Times New Roman" pitchFamily="18" charset="0"/>
-              </a:rPr>
-              <a:t>ip</a:t>
-            </a:r>
-            <a:r>
-              <a:rPr lang="ru-RU" sz="1500" dirty="0" smtClean="0">
-                <a:latin typeface="Times New Roman" pitchFamily="18" charset="0"/>
-                <a:cs typeface="Times New Roman" pitchFamily="18" charset="0"/>
-              </a:rPr>
-              <a:t> </a:t>
-            </a:r>
-            <a:r>
-              <a:rPr lang="ru-RU" sz="1500" dirty="0" err="1" smtClean="0">
-                <a:latin typeface="Times New Roman" pitchFamily="18" charset="0"/>
-                <a:cs typeface="Times New Roman" pitchFamily="18" charset="0"/>
-              </a:rPr>
-              <a:t>nat</a:t>
-            </a:r>
-            <a:r>
-              <a:rPr lang="ru-RU" sz="1500" dirty="0" smtClean="0">
-                <a:latin typeface="Times New Roman" pitchFamily="18" charset="0"/>
-                <a:cs typeface="Times New Roman" pitchFamily="18" charset="0"/>
-              </a:rPr>
-              <a:t> </a:t>
-            </a:r>
-            <a:r>
-              <a:rPr lang="ru-RU" sz="1500" dirty="0" err="1" smtClean="0">
-                <a:latin typeface="Times New Roman" pitchFamily="18" charset="0"/>
-                <a:cs typeface="Times New Roman" pitchFamily="18" charset="0"/>
-              </a:rPr>
-              <a:t>outside</a:t>
-            </a:r>
-            <a:r>
-              <a:rPr lang="ru-RU" sz="1500" dirty="0" smtClean="0">
-                <a:latin typeface="Times New Roman" pitchFamily="18" charset="0"/>
-                <a:cs typeface="Times New Roman" pitchFamily="18" charset="0"/>
-              </a:rPr>
-              <a:t> — это «интернет, тут адреса публичные».</a:t>
-            </a:r>
-          </a:p>
-          <a:p>
-            <a:pPr algn="just"/>
-            <a:r>
-              <a:rPr lang="ru-RU" sz="1500" dirty="0" smtClean="0">
-                <a:latin typeface="Times New Roman" pitchFamily="18" charset="0"/>
-                <a:cs typeface="Times New Roman" pitchFamily="18" charset="0"/>
-              </a:rPr>
-              <a:t>    </a:t>
-            </a:r>
-            <a:r>
-              <a:rPr lang="ru-RU" sz="1500" dirty="0" err="1" smtClean="0">
-                <a:latin typeface="Times New Roman" pitchFamily="18" charset="0"/>
-                <a:cs typeface="Times New Roman" pitchFamily="18" charset="0"/>
-              </a:rPr>
-              <a:t>ip</a:t>
-            </a:r>
-            <a:r>
-              <a:rPr lang="ru-RU" sz="1500" dirty="0" smtClean="0">
-                <a:latin typeface="Times New Roman" pitchFamily="18" charset="0"/>
-                <a:cs typeface="Times New Roman" pitchFamily="18" charset="0"/>
-              </a:rPr>
-              <a:t> </a:t>
-            </a:r>
-            <a:r>
-              <a:rPr lang="ru-RU" sz="1500" dirty="0" err="1" smtClean="0">
-                <a:latin typeface="Times New Roman" pitchFamily="18" charset="0"/>
-                <a:cs typeface="Times New Roman" pitchFamily="18" charset="0"/>
-              </a:rPr>
-              <a:t>nat</a:t>
-            </a:r>
-            <a:r>
-              <a:rPr lang="ru-RU" sz="1500" dirty="0" smtClean="0">
-                <a:latin typeface="Times New Roman" pitchFamily="18" charset="0"/>
-                <a:cs typeface="Times New Roman" pitchFamily="18" charset="0"/>
-              </a:rPr>
-              <a:t> </a:t>
-            </a:r>
-            <a:r>
-              <a:rPr lang="ru-RU" sz="1500" dirty="0" err="1" smtClean="0">
-                <a:latin typeface="Times New Roman" pitchFamily="18" charset="0"/>
-                <a:cs typeface="Times New Roman" pitchFamily="18" charset="0"/>
-              </a:rPr>
-              <a:t>inside</a:t>
-            </a:r>
-            <a:r>
-              <a:rPr lang="ru-RU" sz="1500" dirty="0" smtClean="0">
-                <a:latin typeface="Times New Roman" pitchFamily="18" charset="0"/>
-                <a:cs typeface="Times New Roman" pitchFamily="18" charset="0"/>
-              </a:rPr>
-              <a:t> </a:t>
-            </a:r>
-            <a:r>
-              <a:rPr lang="ru-RU" sz="1500" dirty="0" err="1" smtClean="0">
-                <a:latin typeface="Times New Roman" pitchFamily="18" charset="0"/>
-                <a:cs typeface="Times New Roman" pitchFamily="18" charset="0"/>
-              </a:rPr>
-              <a:t>source</a:t>
-            </a:r>
-            <a:r>
-              <a:rPr lang="ru-RU" sz="1500" dirty="0" smtClean="0">
-                <a:latin typeface="Times New Roman" pitchFamily="18" charset="0"/>
-                <a:cs typeface="Times New Roman" pitchFamily="18" charset="0"/>
-              </a:rPr>
-              <a:t> </a:t>
-            </a:r>
-            <a:r>
-              <a:rPr lang="ru-RU" sz="1500" dirty="0" err="1" smtClean="0">
-                <a:latin typeface="Times New Roman" pitchFamily="18" charset="0"/>
-                <a:cs typeface="Times New Roman" pitchFamily="18" charset="0"/>
-              </a:rPr>
-              <a:t>static</a:t>
-            </a:r>
-            <a:r>
-              <a:rPr lang="ru-RU" sz="1500" dirty="0" smtClean="0">
-                <a:latin typeface="Times New Roman" pitchFamily="18" charset="0"/>
-                <a:cs typeface="Times New Roman" pitchFamily="18" charset="0"/>
-              </a:rPr>
-              <a:t> 192.168.1.10 203.0.113.10 — жёсткое правило: «этот внутренний IP всегда виден снаружи вот под этим публичным IP».</a:t>
-            </a:r>
-          </a:p>
-          <a:p>
-            <a:pPr algn="just"/>
-            <a:r>
-              <a:rPr lang="ru-RU" sz="1500" dirty="0" smtClean="0">
-                <a:latin typeface="Times New Roman" pitchFamily="18" charset="0"/>
-                <a:cs typeface="Times New Roman" pitchFamily="18" charset="0"/>
-              </a:rPr>
-              <a:t>Проверка через </a:t>
-            </a:r>
-            <a:r>
-              <a:rPr lang="ru-RU" sz="1500" dirty="0" err="1" smtClean="0">
-                <a:latin typeface="Times New Roman" pitchFamily="18" charset="0"/>
-                <a:cs typeface="Times New Roman" pitchFamily="18" charset="0"/>
-              </a:rPr>
-              <a:t>show</a:t>
-            </a:r>
-            <a:r>
-              <a:rPr lang="ru-RU" sz="1500" dirty="0" smtClean="0">
-                <a:latin typeface="Times New Roman" pitchFamily="18" charset="0"/>
-                <a:cs typeface="Times New Roman" pitchFamily="18" charset="0"/>
-              </a:rPr>
-              <a:t> </a:t>
-            </a:r>
-            <a:r>
-              <a:rPr lang="ru-RU" sz="1500" dirty="0" err="1" smtClean="0">
-                <a:latin typeface="Times New Roman" pitchFamily="18" charset="0"/>
-                <a:cs typeface="Times New Roman" pitchFamily="18" charset="0"/>
-              </a:rPr>
-              <a:t>ip</a:t>
-            </a:r>
-            <a:r>
-              <a:rPr lang="ru-RU" sz="1500" dirty="0" smtClean="0">
-                <a:latin typeface="Times New Roman" pitchFamily="18" charset="0"/>
-                <a:cs typeface="Times New Roman" pitchFamily="18" charset="0"/>
-              </a:rPr>
-              <a:t> </a:t>
-            </a:r>
-            <a:r>
-              <a:rPr lang="ru-RU" sz="1500" dirty="0" err="1" smtClean="0">
-                <a:latin typeface="Times New Roman" pitchFamily="18" charset="0"/>
-                <a:cs typeface="Times New Roman" pitchFamily="18" charset="0"/>
-              </a:rPr>
-              <a:t>nat</a:t>
-            </a:r>
-            <a:r>
-              <a:rPr lang="ru-RU" sz="1500" dirty="0" smtClean="0">
-                <a:latin typeface="Times New Roman" pitchFamily="18" charset="0"/>
-                <a:cs typeface="Times New Roman" pitchFamily="18" charset="0"/>
-              </a:rPr>
-              <a:t> </a:t>
-            </a:r>
-            <a:r>
-              <a:rPr lang="ru-RU" sz="1500" dirty="0" err="1" smtClean="0">
-                <a:latin typeface="Times New Roman" pitchFamily="18" charset="0"/>
-                <a:cs typeface="Times New Roman" pitchFamily="18" charset="0"/>
-              </a:rPr>
-              <a:t>translations</a:t>
-            </a:r>
-            <a:r>
-              <a:rPr lang="ru-RU" sz="1500" dirty="0" smtClean="0">
-                <a:latin typeface="Times New Roman" pitchFamily="18" charset="0"/>
-                <a:cs typeface="Times New Roman" pitchFamily="18" charset="0"/>
-              </a:rPr>
-              <a:t> показывает таблицу этих переводов, а в симуляции видно, как у пакетов меняется адрес источника/назначения.</a:t>
-            </a:r>
-          </a:p>
-          <a:p>
-            <a:pPr algn="ctr"/>
-            <a:r>
-              <a:rPr lang="ru-RU" sz="1500" b="1" dirty="0" smtClean="0">
-                <a:latin typeface="Times New Roman" pitchFamily="18" charset="0"/>
-                <a:cs typeface="Times New Roman" pitchFamily="18" charset="0"/>
-              </a:rPr>
-              <a:t>Для </a:t>
-            </a:r>
-            <a:r>
-              <a:rPr lang="ru-RU" sz="1500" b="1" dirty="0" smtClean="0">
-                <a:latin typeface="Times New Roman" pitchFamily="18" charset="0"/>
-                <a:cs typeface="Times New Roman" pitchFamily="18" charset="0"/>
-              </a:rPr>
-              <a:t>чего это нужно</a:t>
-            </a:r>
-          </a:p>
-          <a:p>
-            <a:pPr algn="just"/>
-            <a:r>
-              <a:rPr lang="ru-RU" sz="1500" b="1" dirty="0" smtClean="0">
-                <a:latin typeface="Times New Roman" pitchFamily="18" charset="0"/>
-                <a:cs typeface="Times New Roman" pitchFamily="18" charset="0"/>
-              </a:rPr>
-              <a:t>    Чтобы публиковать внутренние сервисы наружу. </a:t>
-            </a:r>
-            <a:r>
-              <a:rPr lang="ru-RU" sz="1500" dirty="0" err="1" smtClean="0">
-                <a:latin typeface="Times New Roman" pitchFamily="18" charset="0"/>
-                <a:cs typeface="Times New Roman" pitchFamily="18" charset="0"/>
-              </a:rPr>
-              <a:t>Веб‑сервер</a:t>
-            </a:r>
-            <a:r>
-              <a:rPr lang="ru-RU" sz="1500" dirty="0" smtClean="0">
-                <a:latin typeface="Times New Roman" pitchFamily="18" charset="0"/>
-                <a:cs typeface="Times New Roman" pitchFamily="18" charset="0"/>
-              </a:rPr>
-              <a:t>, почтовый сервер, терминальный сервер — всё это должно быть доступно извне, но не раскрывать реальные внутренние адреса.</a:t>
-            </a:r>
-          </a:p>
-          <a:p>
-            <a:pPr algn="just"/>
-            <a:r>
-              <a:rPr lang="ru-RU" sz="1500" b="1" dirty="0" smtClean="0">
-                <a:latin typeface="Times New Roman" pitchFamily="18" charset="0"/>
-                <a:cs typeface="Times New Roman" pitchFamily="18" charset="0"/>
-              </a:rPr>
-              <a:t>    Для безопасности. </a:t>
-            </a:r>
-            <a:r>
-              <a:rPr lang="ru-RU" sz="1500" dirty="0" smtClean="0">
-                <a:latin typeface="Times New Roman" pitchFamily="18" charset="0"/>
-                <a:cs typeface="Times New Roman" pitchFamily="18" charset="0"/>
-              </a:rPr>
-              <a:t>Внутри сети используют приватные адреса (192.168.x.x), которые не маршрутизируются в интернете. Так ты прячешь топологию своей сети: снаружи видно только внешний IP, а не реальные IP серверов и рабочих станций.</a:t>
-            </a:r>
-          </a:p>
-          <a:p>
-            <a:pPr algn="just"/>
-            <a:r>
-              <a:rPr lang="ru-RU" sz="1500" b="1" dirty="0" smtClean="0">
-                <a:latin typeface="Times New Roman" pitchFamily="18" charset="0"/>
-                <a:cs typeface="Times New Roman" pitchFamily="18" charset="0"/>
-              </a:rPr>
-              <a:t>    Для контроля доступа. </a:t>
-            </a:r>
-            <a:r>
-              <a:rPr lang="ru-RU" sz="1500" dirty="0" smtClean="0">
-                <a:latin typeface="Times New Roman" pitchFamily="18" charset="0"/>
-                <a:cs typeface="Times New Roman" pitchFamily="18" charset="0"/>
-              </a:rPr>
-              <a:t>Все входящие запросы идут через шлюз (роутер/межсетевой экран), где можно поставить правила безопасности, </a:t>
-            </a:r>
-            <a:r>
-              <a:rPr lang="ru-RU" sz="1500" dirty="0" err="1" smtClean="0">
-                <a:latin typeface="Times New Roman" pitchFamily="18" charset="0"/>
-                <a:cs typeface="Times New Roman" pitchFamily="18" charset="0"/>
-              </a:rPr>
-              <a:t>логирование</a:t>
-            </a:r>
-            <a:r>
-              <a:rPr lang="ru-RU" sz="1500" dirty="0" smtClean="0">
-                <a:latin typeface="Times New Roman" pitchFamily="18" charset="0"/>
-                <a:cs typeface="Times New Roman" pitchFamily="18" charset="0"/>
-              </a:rPr>
-              <a:t>, фильтрацию.</a:t>
-            </a:r>
-          </a:p>
-          <a:p>
-            <a:pPr algn="just"/>
-            <a:r>
-              <a:rPr lang="ru-RU" sz="1500" b="1" dirty="0" smtClean="0">
-                <a:latin typeface="Times New Roman" pitchFamily="18" charset="0"/>
-                <a:cs typeface="Times New Roman" pitchFamily="18" charset="0"/>
-              </a:rPr>
-              <a:t>    Для экономии публичных </a:t>
-            </a:r>
-            <a:r>
-              <a:rPr lang="ru-RU" sz="1500" b="1" dirty="0" err="1" smtClean="0">
-                <a:latin typeface="Times New Roman" pitchFamily="18" charset="0"/>
-                <a:cs typeface="Times New Roman" pitchFamily="18" charset="0"/>
-              </a:rPr>
-              <a:t>IP‑адресов</a:t>
-            </a:r>
-            <a:r>
-              <a:rPr lang="ru-RU" sz="1500" b="1" dirty="0" smtClean="0">
-                <a:latin typeface="Times New Roman" pitchFamily="18" charset="0"/>
-                <a:cs typeface="Times New Roman" pitchFamily="18" charset="0"/>
-              </a:rPr>
-              <a:t>. </a:t>
-            </a:r>
-            <a:r>
-              <a:rPr lang="ru-RU" sz="1500" dirty="0" smtClean="0">
-                <a:latin typeface="Times New Roman" pitchFamily="18" charset="0"/>
-                <a:cs typeface="Times New Roman" pitchFamily="18" charset="0"/>
-              </a:rPr>
-              <a:t>Раньше их было мало, и NAT был способом «растянуть» несколько внутренних устройств на один внешний IP. Сейчас это </a:t>
-            </a:r>
-            <a:r>
-              <a:rPr lang="ru-RU" sz="1500" dirty="0" err="1" smtClean="0">
-                <a:latin typeface="Times New Roman" pitchFamily="18" charset="0"/>
-                <a:cs typeface="Times New Roman" pitchFamily="18" charset="0"/>
-              </a:rPr>
-              <a:t>по‑прежнему</a:t>
-            </a:r>
-            <a:r>
-              <a:rPr lang="ru-RU" sz="1500" dirty="0" smtClean="0">
-                <a:latin typeface="Times New Roman" pitchFamily="18" charset="0"/>
-                <a:cs typeface="Times New Roman" pitchFamily="18" charset="0"/>
-              </a:rPr>
-              <a:t> стандарт, даже когда публичных адресов хватает.</a:t>
-            </a:r>
-          </a:p>
-          <a:p>
-            <a:pPr algn="ctr"/>
-            <a:r>
-              <a:rPr lang="ru-RU" sz="1500" b="1" dirty="0" smtClean="0">
-                <a:latin typeface="Times New Roman" pitchFamily="18" charset="0"/>
-                <a:cs typeface="Times New Roman" pitchFamily="18" charset="0"/>
-              </a:rPr>
-              <a:t>Простой </a:t>
-            </a:r>
-            <a:r>
-              <a:rPr lang="ru-RU" sz="1500" b="1" dirty="0" smtClean="0">
-                <a:latin typeface="Times New Roman" pitchFamily="18" charset="0"/>
-                <a:cs typeface="Times New Roman" pitchFamily="18" charset="0"/>
-              </a:rPr>
-              <a:t>пример из реального мира</a:t>
-            </a:r>
-          </a:p>
-          <a:p>
-            <a:pPr algn="just"/>
-            <a:r>
-              <a:rPr lang="ru-RU" sz="1500" smtClean="0">
-                <a:latin typeface="Times New Roman" pitchFamily="18" charset="0"/>
-                <a:cs typeface="Times New Roman" pitchFamily="18" charset="0"/>
-              </a:rPr>
-              <a:t>Представьте </a:t>
-            </a:r>
-            <a:r>
-              <a:rPr lang="ru-RU" sz="1500" dirty="0" smtClean="0">
-                <a:latin typeface="Times New Roman" pitchFamily="18" charset="0"/>
-                <a:cs typeface="Times New Roman" pitchFamily="18" charset="0"/>
-              </a:rPr>
-              <a:t>небольшой офис </a:t>
-            </a:r>
-            <a:r>
-              <a:rPr lang="ru-RU" sz="1500" dirty="0" err="1" smtClean="0">
-                <a:latin typeface="Times New Roman" pitchFamily="18" charset="0"/>
-                <a:cs typeface="Times New Roman" pitchFamily="18" charset="0"/>
-              </a:rPr>
-              <a:t>интернет‑магазина</a:t>
-            </a:r>
-            <a:r>
-              <a:rPr lang="ru-RU" sz="1500" dirty="0" smtClean="0">
-                <a:latin typeface="Times New Roman" pitchFamily="18" charset="0"/>
-                <a:cs typeface="Times New Roman" pitchFamily="18" charset="0"/>
-              </a:rPr>
-              <a:t>:</a:t>
-            </a:r>
-          </a:p>
-          <a:p>
-            <a:pPr algn="just"/>
-            <a:r>
-              <a:rPr lang="ru-RU" sz="1500" dirty="0" smtClean="0">
-                <a:latin typeface="Times New Roman" pitchFamily="18" charset="0"/>
-                <a:cs typeface="Times New Roman" pitchFamily="18" charset="0"/>
-              </a:rPr>
-              <a:t>    Внутри у них </a:t>
-            </a:r>
-            <a:r>
-              <a:rPr lang="ru-RU" sz="1500" dirty="0" err="1" smtClean="0">
-                <a:latin typeface="Times New Roman" pitchFamily="18" charset="0"/>
-                <a:cs typeface="Times New Roman" pitchFamily="18" charset="0"/>
-              </a:rPr>
-              <a:t>веб‑сервер</a:t>
-            </a:r>
-            <a:r>
-              <a:rPr lang="ru-RU" sz="1500" dirty="0" smtClean="0">
-                <a:latin typeface="Times New Roman" pitchFamily="18" charset="0"/>
-                <a:cs typeface="Times New Roman" pitchFamily="18" charset="0"/>
-              </a:rPr>
-              <a:t> на адресе 192.168.1.10 — он отдаёт сайт магазина.</a:t>
-            </a:r>
-          </a:p>
-          <a:p>
-            <a:pPr algn="just"/>
-            <a:r>
-              <a:rPr lang="ru-RU" sz="1500" dirty="0" smtClean="0">
-                <a:latin typeface="Times New Roman" pitchFamily="18" charset="0"/>
-                <a:cs typeface="Times New Roman" pitchFamily="18" charset="0"/>
-              </a:rPr>
-              <a:t>    У провайдера им выдали один публичный IP, например 203.0.113.10.</a:t>
-            </a:r>
-          </a:p>
-          <a:p>
-            <a:pPr algn="just"/>
-            <a:r>
-              <a:rPr lang="ru-RU" sz="1500" dirty="0" smtClean="0">
-                <a:latin typeface="Times New Roman" pitchFamily="18" charset="0"/>
-                <a:cs typeface="Times New Roman" pitchFamily="18" charset="0"/>
-              </a:rPr>
-              <a:t>    Клиенты заходят на сайт по этому публичному IP.</a:t>
-            </a:r>
-          </a:p>
-          <a:p>
-            <a:pPr algn="just"/>
-            <a:r>
-              <a:rPr lang="ru-RU" sz="1500" dirty="0" smtClean="0">
-                <a:latin typeface="Times New Roman" pitchFamily="18" charset="0"/>
-                <a:cs typeface="Times New Roman" pitchFamily="18" charset="0"/>
-              </a:rPr>
-              <a:t>Администратор настраивает на пограничном роутере статический NAT: «запросы на 203.0.113.10 отправляй на 192.168.1.10». Теперь:</a:t>
-            </a:r>
-          </a:p>
-          <a:p>
-            <a:pPr algn="just"/>
-            <a:r>
-              <a:rPr lang="ru-RU" sz="1500" dirty="0" smtClean="0">
-                <a:latin typeface="Times New Roman" pitchFamily="18" charset="0"/>
-                <a:cs typeface="Times New Roman" pitchFamily="18" charset="0"/>
-              </a:rPr>
-              <a:t>    Клиент из интернета видит только 203.0.113.10 и открывает сайт.</a:t>
-            </a:r>
-          </a:p>
-          <a:p>
-            <a:pPr algn="just"/>
-            <a:r>
-              <a:rPr lang="ru-RU" sz="1500" dirty="0" smtClean="0">
-                <a:latin typeface="Times New Roman" pitchFamily="18" charset="0"/>
-                <a:cs typeface="Times New Roman" pitchFamily="18" charset="0"/>
-              </a:rPr>
-              <a:t>    Внутри офиса никто не менял настройки сервера.</a:t>
-            </a:r>
-          </a:p>
-          <a:p>
-            <a:pPr algn="just"/>
-            <a:r>
-              <a:rPr lang="ru-RU" sz="1500" dirty="0" smtClean="0">
-                <a:latin typeface="Times New Roman" pitchFamily="18" charset="0"/>
-                <a:cs typeface="Times New Roman" pitchFamily="18" charset="0"/>
-              </a:rPr>
-              <a:t>    Если завтра сервер переедет на другой внутренний IP, администратор просто поменяет правило на роутере, и снаружи ничего не </a:t>
-            </a:r>
-            <a:r>
-              <a:rPr lang="ru-RU" sz="1500" dirty="0" smtClean="0">
-                <a:latin typeface="Times New Roman" pitchFamily="18" charset="0"/>
-                <a:cs typeface="Times New Roman" pitchFamily="18" charset="0"/>
-              </a:rPr>
-              <a:t>изменится.</a:t>
-            </a:r>
-            <a:endParaRPr lang="ru-RU" sz="1500" dirty="0" smtClean="0">
+              <a:rPr lang="ru-RU" sz="2800" b="1" dirty="0" smtClean="0">
+                <a:solidFill>
+                  <a:srgbClr val="FF0000"/>
+                </a:solidFill>
+                <a:latin typeface="Times New Roman" pitchFamily="18" charset="0"/>
+                <a:cs typeface="Times New Roman" pitchFamily="18" charset="0"/>
+              </a:rPr>
+              <a:t>Задание 1</a:t>
+            </a:r>
+            <a:endParaRPr lang="ru-RU" sz="2800" b="1" dirty="0" smtClean="0">
+              <a:solidFill>
+                <a:srgbClr val="FF0000"/>
+              </a:solidFill>
               <a:latin typeface="Times New Roman" pitchFamily="18" charset="0"/>
               <a:cs typeface="Times New Roman" pitchFamily="18" charset="0"/>
             </a:endParaRPr>
           </a:p>
-        </p:txBody>
-      </p:sp>
+          <a:p>
+            <a:pPr algn="just"/>
+            <a:r>
+              <a:rPr lang="ru-RU" sz="2000" dirty="0" smtClean="0">
+                <a:latin typeface="Times New Roman" pitchFamily="18" charset="0"/>
+                <a:cs typeface="Times New Roman" pitchFamily="18" charset="0"/>
+              </a:rPr>
+              <a:t>Вы создаёте ситуацию, когда внутри сети (в офисе) есть сервер с «личным» адресом, который никому снаружи не виден, но при этом люди из интернета должны к нему попадать. Роутер выступает переводчиком: он заранее знает правило — «если кто-то стучится на внешний адрес 203.0.113.10, отдай этот запрос на внутренний сервер 192.168.1.10».</a:t>
+            </a:r>
+          </a:p>
+          <a:p>
+            <a:pPr algn="just"/>
+            <a:r>
+              <a:rPr lang="ru-RU" sz="2000" dirty="0" smtClean="0">
+                <a:latin typeface="Times New Roman" pitchFamily="18" charset="0"/>
+                <a:cs typeface="Times New Roman" pitchFamily="18" charset="0"/>
+              </a:rPr>
+              <a:t>В шагах задания вы буквально прописываете это правило и помечаете интерфейсы:</a:t>
+            </a:r>
+          </a:p>
+          <a:p>
+            <a:pPr algn="just"/>
+            <a:r>
+              <a:rPr lang="ru-RU" sz="2000" dirty="0" smtClean="0">
+                <a:latin typeface="Times New Roman" pitchFamily="18" charset="0"/>
+                <a:cs typeface="Times New Roman" pitchFamily="18" charset="0"/>
+              </a:rPr>
+              <a:t>    </a:t>
+            </a:r>
+            <a:r>
+              <a:rPr lang="ru-RU" sz="2000" dirty="0" err="1" smtClean="0">
+                <a:latin typeface="Times New Roman" pitchFamily="18" charset="0"/>
+                <a:cs typeface="Times New Roman" pitchFamily="18" charset="0"/>
+              </a:rPr>
+              <a:t>ip</a:t>
+            </a:r>
+            <a:r>
+              <a:rPr lang="ru-RU" sz="2000" dirty="0" smtClean="0">
+                <a:latin typeface="Times New Roman" pitchFamily="18" charset="0"/>
+                <a:cs typeface="Times New Roman" pitchFamily="18" charset="0"/>
+              </a:rPr>
+              <a:t> </a:t>
+            </a:r>
+            <a:r>
+              <a:rPr lang="ru-RU" sz="2000" dirty="0" err="1" smtClean="0">
+                <a:latin typeface="Times New Roman" pitchFamily="18" charset="0"/>
+                <a:cs typeface="Times New Roman" pitchFamily="18" charset="0"/>
+              </a:rPr>
+              <a:t>nat</a:t>
+            </a:r>
+            <a:r>
+              <a:rPr lang="ru-RU" sz="2000" dirty="0" smtClean="0">
+                <a:latin typeface="Times New Roman" pitchFamily="18" charset="0"/>
+                <a:cs typeface="Times New Roman" pitchFamily="18" charset="0"/>
+              </a:rPr>
+              <a:t> </a:t>
+            </a:r>
+            <a:r>
+              <a:rPr lang="ru-RU" sz="2000" dirty="0" err="1" smtClean="0">
+                <a:latin typeface="Times New Roman" pitchFamily="18" charset="0"/>
+                <a:cs typeface="Times New Roman" pitchFamily="18" charset="0"/>
+              </a:rPr>
+              <a:t>inside</a:t>
+            </a:r>
+            <a:r>
+              <a:rPr lang="ru-RU" sz="2000" dirty="0" smtClean="0">
+                <a:latin typeface="Times New Roman" pitchFamily="18" charset="0"/>
+                <a:cs typeface="Times New Roman" pitchFamily="18" charset="0"/>
+              </a:rPr>
+              <a:t> — это «наша сеть, тут адреса приватные».</a:t>
+            </a:r>
+          </a:p>
+          <a:p>
+            <a:pPr algn="just"/>
+            <a:r>
+              <a:rPr lang="ru-RU" sz="2000" dirty="0" smtClean="0">
+                <a:latin typeface="Times New Roman" pitchFamily="18" charset="0"/>
+                <a:cs typeface="Times New Roman" pitchFamily="18" charset="0"/>
+              </a:rPr>
+              <a:t>    </a:t>
+            </a:r>
+            <a:r>
+              <a:rPr lang="ru-RU" sz="2000" dirty="0" err="1" smtClean="0">
+                <a:latin typeface="Times New Roman" pitchFamily="18" charset="0"/>
+                <a:cs typeface="Times New Roman" pitchFamily="18" charset="0"/>
+              </a:rPr>
+              <a:t>ip</a:t>
+            </a:r>
+            <a:r>
+              <a:rPr lang="ru-RU" sz="2000" dirty="0" smtClean="0">
+                <a:latin typeface="Times New Roman" pitchFamily="18" charset="0"/>
+                <a:cs typeface="Times New Roman" pitchFamily="18" charset="0"/>
+              </a:rPr>
+              <a:t> </a:t>
+            </a:r>
+            <a:r>
+              <a:rPr lang="ru-RU" sz="2000" dirty="0" err="1" smtClean="0">
+                <a:latin typeface="Times New Roman" pitchFamily="18" charset="0"/>
+                <a:cs typeface="Times New Roman" pitchFamily="18" charset="0"/>
+              </a:rPr>
+              <a:t>nat</a:t>
+            </a:r>
+            <a:r>
+              <a:rPr lang="ru-RU" sz="2000" dirty="0" smtClean="0">
+                <a:latin typeface="Times New Roman" pitchFamily="18" charset="0"/>
+                <a:cs typeface="Times New Roman" pitchFamily="18" charset="0"/>
+              </a:rPr>
+              <a:t> </a:t>
+            </a:r>
+            <a:r>
+              <a:rPr lang="ru-RU" sz="2000" dirty="0" err="1" smtClean="0">
+                <a:latin typeface="Times New Roman" pitchFamily="18" charset="0"/>
+                <a:cs typeface="Times New Roman" pitchFamily="18" charset="0"/>
+              </a:rPr>
+              <a:t>outside</a:t>
+            </a:r>
+            <a:r>
+              <a:rPr lang="ru-RU" sz="2000" dirty="0" smtClean="0">
+                <a:latin typeface="Times New Roman" pitchFamily="18" charset="0"/>
+                <a:cs typeface="Times New Roman" pitchFamily="18" charset="0"/>
+              </a:rPr>
+              <a:t> — это «интернет, тут адреса публичные».</a:t>
+            </a:r>
+          </a:p>
+          <a:p>
+            <a:pPr algn="just"/>
+            <a:r>
+              <a:rPr lang="ru-RU" sz="2000" dirty="0" smtClean="0">
+                <a:latin typeface="Times New Roman" pitchFamily="18" charset="0"/>
+                <a:cs typeface="Times New Roman" pitchFamily="18" charset="0"/>
+              </a:rPr>
+              <a:t>    </a:t>
+            </a:r>
+            <a:r>
+              <a:rPr lang="ru-RU" sz="2000" dirty="0" err="1" smtClean="0">
+                <a:latin typeface="Times New Roman" pitchFamily="18" charset="0"/>
+                <a:cs typeface="Times New Roman" pitchFamily="18" charset="0"/>
+              </a:rPr>
+              <a:t>ip</a:t>
+            </a:r>
+            <a:r>
+              <a:rPr lang="ru-RU" sz="2000" dirty="0" smtClean="0">
+                <a:latin typeface="Times New Roman" pitchFamily="18" charset="0"/>
+                <a:cs typeface="Times New Roman" pitchFamily="18" charset="0"/>
+              </a:rPr>
+              <a:t> </a:t>
+            </a:r>
+            <a:r>
+              <a:rPr lang="ru-RU" sz="2000" dirty="0" err="1" smtClean="0">
+                <a:latin typeface="Times New Roman" pitchFamily="18" charset="0"/>
+                <a:cs typeface="Times New Roman" pitchFamily="18" charset="0"/>
+              </a:rPr>
+              <a:t>nat</a:t>
+            </a:r>
+            <a:r>
+              <a:rPr lang="ru-RU" sz="2000" dirty="0" smtClean="0">
+                <a:latin typeface="Times New Roman" pitchFamily="18" charset="0"/>
+                <a:cs typeface="Times New Roman" pitchFamily="18" charset="0"/>
+              </a:rPr>
+              <a:t> </a:t>
+            </a:r>
+            <a:r>
+              <a:rPr lang="ru-RU" sz="2000" dirty="0" err="1" smtClean="0">
+                <a:latin typeface="Times New Roman" pitchFamily="18" charset="0"/>
+                <a:cs typeface="Times New Roman" pitchFamily="18" charset="0"/>
+              </a:rPr>
+              <a:t>inside</a:t>
+            </a:r>
+            <a:r>
+              <a:rPr lang="ru-RU" sz="2000" dirty="0" smtClean="0">
+                <a:latin typeface="Times New Roman" pitchFamily="18" charset="0"/>
+                <a:cs typeface="Times New Roman" pitchFamily="18" charset="0"/>
+              </a:rPr>
+              <a:t> </a:t>
+            </a:r>
+            <a:r>
+              <a:rPr lang="ru-RU" sz="2000" dirty="0" err="1" smtClean="0">
+                <a:latin typeface="Times New Roman" pitchFamily="18" charset="0"/>
+                <a:cs typeface="Times New Roman" pitchFamily="18" charset="0"/>
+              </a:rPr>
+              <a:t>source</a:t>
+            </a:r>
+            <a:r>
+              <a:rPr lang="ru-RU" sz="2000" dirty="0" smtClean="0">
+                <a:latin typeface="Times New Roman" pitchFamily="18" charset="0"/>
+                <a:cs typeface="Times New Roman" pitchFamily="18" charset="0"/>
+              </a:rPr>
+              <a:t> </a:t>
+            </a:r>
+            <a:r>
+              <a:rPr lang="ru-RU" sz="2000" dirty="0" err="1" smtClean="0">
+                <a:latin typeface="Times New Roman" pitchFamily="18" charset="0"/>
+                <a:cs typeface="Times New Roman" pitchFamily="18" charset="0"/>
+              </a:rPr>
+              <a:t>static</a:t>
+            </a:r>
+            <a:r>
+              <a:rPr lang="ru-RU" sz="2000" dirty="0" smtClean="0">
+                <a:latin typeface="Times New Roman" pitchFamily="18" charset="0"/>
+                <a:cs typeface="Times New Roman" pitchFamily="18" charset="0"/>
+              </a:rPr>
+              <a:t> 192.168.1.10 203.0.113.10 — жёсткое правило: «этот внутренний IP всегда виден снаружи вот под этим публичным IP».</a:t>
+            </a:r>
+          </a:p>
+          <a:p>
+            <a:pPr algn="just"/>
+            <a:r>
+              <a:rPr lang="ru-RU" sz="2000" dirty="0" smtClean="0">
+                <a:latin typeface="Times New Roman" pitchFamily="18" charset="0"/>
+                <a:cs typeface="Times New Roman" pitchFamily="18" charset="0"/>
+              </a:rPr>
+              <a:t>Проверка через </a:t>
+            </a:r>
+            <a:r>
+              <a:rPr lang="ru-RU" sz="2000" dirty="0" err="1" smtClean="0">
+                <a:latin typeface="Times New Roman" pitchFamily="18" charset="0"/>
+                <a:cs typeface="Times New Roman" pitchFamily="18" charset="0"/>
+              </a:rPr>
+              <a:t>show</a:t>
+            </a:r>
+            <a:r>
+              <a:rPr lang="ru-RU" sz="2000" dirty="0" smtClean="0">
+                <a:latin typeface="Times New Roman" pitchFamily="18" charset="0"/>
+                <a:cs typeface="Times New Roman" pitchFamily="18" charset="0"/>
+              </a:rPr>
+              <a:t> </a:t>
+            </a:r>
+            <a:r>
+              <a:rPr lang="ru-RU" sz="2000" dirty="0" err="1" smtClean="0">
+                <a:latin typeface="Times New Roman" pitchFamily="18" charset="0"/>
+                <a:cs typeface="Times New Roman" pitchFamily="18" charset="0"/>
+              </a:rPr>
+              <a:t>ip</a:t>
+            </a:r>
+            <a:r>
+              <a:rPr lang="ru-RU" sz="2000" dirty="0" smtClean="0">
+                <a:latin typeface="Times New Roman" pitchFamily="18" charset="0"/>
+                <a:cs typeface="Times New Roman" pitchFamily="18" charset="0"/>
+              </a:rPr>
+              <a:t> </a:t>
+            </a:r>
+            <a:r>
+              <a:rPr lang="ru-RU" sz="2000" dirty="0" err="1" smtClean="0">
+                <a:latin typeface="Times New Roman" pitchFamily="18" charset="0"/>
+                <a:cs typeface="Times New Roman" pitchFamily="18" charset="0"/>
+              </a:rPr>
+              <a:t>nat</a:t>
+            </a:r>
+            <a:r>
+              <a:rPr lang="ru-RU" sz="2000" dirty="0" smtClean="0">
+                <a:latin typeface="Times New Roman" pitchFamily="18" charset="0"/>
+                <a:cs typeface="Times New Roman" pitchFamily="18" charset="0"/>
+              </a:rPr>
+              <a:t> </a:t>
+            </a:r>
+            <a:r>
+              <a:rPr lang="ru-RU" sz="2000" dirty="0" err="1" smtClean="0">
+                <a:latin typeface="Times New Roman" pitchFamily="18" charset="0"/>
+                <a:cs typeface="Times New Roman" pitchFamily="18" charset="0"/>
+              </a:rPr>
+              <a:t>translations</a:t>
+            </a:r>
+            <a:r>
+              <a:rPr lang="ru-RU" sz="2000" dirty="0" smtClean="0">
+                <a:latin typeface="Times New Roman" pitchFamily="18" charset="0"/>
+                <a:cs typeface="Times New Roman" pitchFamily="18" charset="0"/>
+              </a:rPr>
+              <a:t> показывает таблицу этих переводов, а в симуляции видно, как у пакетов меняется адрес источника/назначения</a:t>
+            </a:r>
+            <a:r>
+              <a:rPr lang="ru-RU" sz="2000" dirty="0" smtClean="0">
+                <a:latin typeface="Times New Roman" pitchFamily="18" charset="0"/>
+                <a:cs typeface="Times New Roman" pitchFamily="18" charset="0"/>
+              </a:rPr>
+              <a:t>.</a:t>
+            </a:r>
+            <a:endParaRPr lang="ru-RU" sz="2000" dirty="0" smtClean="0">
+              <a:latin typeface="Times New Roman" pitchFamily="18" charset="0"/>
+              <a:cs typeface="Times New Roman" pitchFamily="18" charset="0"/>
+            </a:endParaRPr>
+          </a:p>
+        </p:txBody>
+      </p:sp>
+      <p:pic>
+        <p:nvPicPr>
+          <p:cNvPr id="3" name="Рисунок 2"/>
+          <p:cNvPicPr>
+            <a:picLocks noChangeAspect="1"/>
+          </p:cNvPicPr>
+          <p:nvPr/>
+        </p:nvPicPr>
+        <p:blipFill>
+          <a:blip r:embed="rId2"/>
+          <a:stretch>
+            <a:fillRect/>
+          </a:stretch>
+        </p:blipFill>
+        <p:spPr>
+          <a:xfrm>
+            <a:off x="3078480" y="3781614"/>
+            <a:ext cx="6035040" cy="3076386"/>
+          </a:xfrm>
+          <a:prstGeom prst="rect">
+            <a:avLst/>
+          </a:prstGeom>
+        </p:spPr>
+      </p:pic>
     </p:spTree>
+  </p:cSld>
+  <p:clrMapOvr>
+    <a:masterClrMapping/>
+  </p:clrMapOvr>
+</p:sld>
+</file>
+
+<file path=ppt/slides/slide3.xml><?xml version="1.0" encoding="utf-8"?>
+<p:sld xmlns:a="http://schemas.openxmlformats.org/drawingml/2006/main" xmlns:r="http://schemas.openxmlformats.org/officeDocument/2006/relationships" xmlns:p="http://schemas.openxmlformats.org/presentationml/2006/main">
+  <p:cSld>
+    <p:spTree>
+      <p:nvGrpSpPr>
+        <p:cNvPr id="1" name=""/>
+        <p:cNvGrpSpPr/>
+        <p:nvPr/>
+      </p:nvGrpSpPr>
+      <p:grpSpPr>
+        <a:xfrm>
+          <a:off x="0" y="0"/>
+          <a:ext cx="0" cy="0"/>
+          <a:chOff x="0" y="0"/>
+          <a:chExt cx="0" cy="0"/>
+        </a:xfrm>
+      </p:grpSpPr>
+      <p:sp>
+        <p:nvSpPr>
+          <p:cNvPr id="2" name="Прямоугольник 1"/>
+          <p:cNvSpPr/>
+          <p:nvPr/>
+        </p:nvSpPr>
+        <p:spPr>
+          <a:xfrm>
+            <a:off x="0" y="0"/>
+            <a:ext cx="12192000" cy="6863417"/>
+          </a:xfrm>
+          <a:prstGeom prst="rect">
+            <a:avLst/>
+          </a:prstGeom>
+        </p:spPr>
+        <p:txBody>
+          <a:bodyPr wrap="square">
+            <a:spAutoFit/>
+          </a:bodyPr>
+          <a:lstStyle/>
+          <a:p>
+            <a:pPr algn="ctr"/>
+            <a:r>
+              <a:rPr lang="ru-RU" sz="2000" b="1" dirty="0" smtClean="0">
+                <a:latin typeface="Times New Roman" pitchFamily="18" charset="0"/>
+                <a:cs typeface="Times New Roman" pitchFamily="18" charset="0"/>
+              </a:rPr>
+              <a:t>Для </a:t>
+            </a:r>
+            <a:r>
+              <a:rPr lang="ru-RU" sz="2000" b="1" dirty="0" smtClean="0">
+                <a:latin typeface="Times New Roman" pitchFamily="18" charset="0"/>
+                <a:cs typeface="Times New Roman" pitchFamily="18" charset="0"/>
+              </a:rPr>
+              <a:t>чего это нужно</a:t>
+            </a:r>
+          </a:p>
+          <a:p>
+            <a:pPr algn="just"/>
+            <a:r>
+              <a:rPr lang="ru-RU" sz="2000" b="1" dirty="0" smtClean="0">
+                <a:latin typeface="Times New Roman" pitchFamily="18" charset="0"/>
+                <a:cs typeface="Times New Roman" pitchFamily="18" charset="0"/>
+              </a:rPr>
+              <a:t>    Чтобы публиковать внутренние сервисы наружу. </a:t>
+            </a:r>
+            <a:r>
+              <a:rPr lang="ru-RU" sz="2000" dirty="0" err="1" smtClean="0">
+                <a:latin typeface="Times New Roman" pitchFamily="18" charset="0"/>
+                <a:cs typeface="Times New Roman" pitchFamily="18" charset="0"/>
+              </a:rPr>
+              <a:t>Веб‑сервер</a:t>
+            </a:r>
+            <a:r>
+              <a:rPr lang="ru-RU" sz="2000" dirty="0" smtClean="0">
+                <a:latin typeface="Times New Roman" pitchFamily="18" charset="0"/>
+                <a:cs typeface="Times New Roman" pitchFamily="18" charset="0"/>
+              </a:rPr>
+              <a:t>, почтовый сервер, терминальный сервер — всё это должно быть доступно извне, но не раскрывать реальные внутренние адреса.</a:t>
+            </a:r>
+          </a:p>
+          <a:p>
+            <a:pPr algn="just"/>
+            <a:r>
+              <a:rPr lang="ru-RU" sz="2000" b="1" dirty="0" smtClean="0">
+                <a:latin typeface="Times New Roman" pitchFamily="18" charset="0"/>
+                <a:cs typeface="Times New Roman" pitchFamily="18" charset="0"/>
+              </a:rPr>
+              <a:t>    Для безопасности. </a:t>
+            </a:r>
+            <a:r>
+              <a:rPr lang="ru-RU" sz="2000" dirty="0" smtClean="0">
+                <a:latin typeface="Times New Roman" pitchFamily="18" charset="0"/>
+                <a:cs typeface="Times New Roman" pitchFamily="18" charset="0"/>
+              </a:rPr>
+              <a:t>Внутри сети используют приватные адреса (192.168.x.x), которые не маршрутизируются в интернете. Так ты прячешь топологию своей сети: снаружи видно только внешний IP, а не реальные IP серверов и рабочих станций.</a:t>
+            </a:r>
+          </a:p>
+          <a:p>
+            <a:pPr algn="just"/>
+            <a:r>
+              <a:rPr lang="ru-RU" sz="2000" b="1" dirty="0" smtClean="0">
+                <a:latin typeface="Times New Roman" pitchFamily="18" charset="0"/>
+                <a:cs typeface="Times New Roman" pitchFamily="18" charset="0"/>
+              </a:rPr>
+              <a:t>    Для контроля доступа. </a:t>
+            </a:r>
+            <a:r>
+              <a:rPr lang="ru-RU" sz="2000" dirty="0" smtClean="0">
+                <a:latin typeface="Times New Roman" pitchFamily="18" charset="0"/>
+                <a:cs typeface="Times New Roman" pitchFamily="18" charset="0"/>
+              </a:rPr>
+              <a:t>Все входящие запросы идут через шлюз (роутер/межсетевой экран), где можно поставить правила безопасности, </a:t>
+            </a:r>
+            <a:r>
+              <a:rPr lang="ru-RU" sz="2000" dirty="0" err="1" smtClean="0">
+                <a:latin typeface="Times New Roman" pitchFamily="18" charset="0"/>
+                <a:cs typeface="Times New Roman" pitchFamily="18" charset="0"/>
+              </a:rPr>
+              <a:t>логирование</a:t>
+            </a:r>
+            <a:r>
+              <a:rPr lang="ru-RU" sz="2000" dirty="0" smtClean="0">
+                <a:latin typeface="Times New Roman" pitchFamily="18" charset="0"/>
+                <a:cs typeface="Times New Roman" pitchFamily="18" charset="0"/>
+              </a:rPr>
+              <a:t>, фильтрацию.</a:t>
+            </a:r>
+          </a:p>
+          <a:p>
+            <a:pPr algn="just"/>
+            <a:r>
+              <a:rPr lang="ru-RU" sz="2000" b="1" dirty="0" smtClean="0">
+                <a:latin typeface="Times New Roman" pitchFamily="18" charset="0"/>
+                <a:cs typeface="Times New Roman" pitchFamily="18" charset="0"/>
+              </a:rPr>
+              <a:t>    Для экономии публичных </a:t>
+            </a:r>
+            <a:r>
+              <a:rPr lang="ru-RU" sz="2000" b="1" dirty="0" err="1" smtClean="0">
+                <a:latin typeface="Times New Roman" pitchFamily="18" charset="0"/>
+                <a:cs typeface="Times New Roman" pitchFamily="18" charset="0"/>
+              </a:rPr>
+              <a:t>IP‑адресов</a:t>
+            </a:r>
+            <a:r>
+              <a:rPr lang="ru-RU" sz="2000" b="1" dirty="0" smtClean="0">
+                <a:latin typeface="Times New Roman" pitchFamily="18" charset="0"/>
+                <a:cs typeface="Times New Roman" pitchFamily="18" charset="0"/>
+              </a:rPr>
+              <a:t>. </a:t>
+            </a:r>
+            <a:r>
+              <a:rPr lang="ru-RU" sz="2000" dirty="0" smtClean="0">
+                <a:latin typeface="Times New Roman" pitchFamily="18" charset="0"/>
+                <a:cs typeface="Times New Roman" pitchFamily="18" charset="0"/>
+              </a:rPr>
+              <a:t>Раньше их было мало, и NAT был способом «растянуть» несколько внутренних устройств на один внешний IP. Сейчас это </a:t>
+            </a:r>
+            <a:r>
+              <a:rPr lang="ru-RU" sz="2000" dirty="0" err="1" smtClean="0">
+                <a:latin typeface="Times New Roman" pitchFamily="18" charset="0"/>
+                <a:cs typeface="Times New Roman" pitchFamily="18" charset="0"/>
+              </a:rPr>
+              <a:t>по‑прежнему</a:t>
+            </a:r>
+            <a:r>
+              <a:rPr lang="ru-RU" sz="2000" dirty="0" smtClean="0">
+                <a:latin typeface="Times New Roman" pitchFamily="18" charset="0"/>
+                <a:cs typeface="Times New Roman" pitchFamily="18" charset="0"/>
+              </a:rPr>
+              <a:t> стандарт, даже когда публичных адресов хватает.</a:t>
+            </a:r>
+          </a:p>
+          <a:p>
+            <a:pPr algn="ctr"/>
+            <a:r>
+              <a:rPr lang="ru-RU" sz="2000" b="1" dirty="0" smtClean="0">
+                <a:latin typeface="Times New Roman" pitchFamily="18" charset="0"/>
+                <a:cs typeface="Times New Roman" pitchFamily="18" charset="0"/>
+              </a:rPr>
+              <a:t>Простой пример из реального мира</a:t>
+            </a:r>
+          </a:p>
+          <a:p>
+            <a:pPr algn="just"/>
+            <a:r>
+              <a:rPr lang="ru-RU" sz="2000" dirty="0" smtClean="0">
+                <a:latin typeface="Times New Roman" pitchFamily="18" charset="0"/>
+                <a:cs typeface="Times New Roman" pitchFamily="18" charset="0"/>
+              </a:rPr>
+              <a:t>Представьте небольшой офис интернет‑магазина:</a:t>
+            </a:r>
+          </a:p>
+          <a:p>
+            <a:pPr algn="just"/>
+            <a:r>
+              <a:rPr lang="ru-RU" sz="2000" dirty="0" smtClean="0">
+                <a:latin typeface="Times New Roman" pitchFamily="18" charset="0"/>
+                <a:cs typeface="Times New Roman" pitchFamily="18" charset="0"/>
+              </a:rPr>
+              <a:t>    Внутри у них </a:t>
+            </a:r>
+            <a:r>
+              <a:rPr lang="ru-RU" sz="2000" dirty="0" err="1" smtClean="0">
+                <a:latin typeface="Times New Roman" pitchFamily="18" charset="0"/>
+                <a:cs typeface="Times New Roman" pitchFamily="18" charset="0"/>
+              </a:rPr>
+              <a:t>веб‑сервер</a:t>
+            </a:r>
+            <a:r>
+              <a:rPr lang="ru-RU" sz="2000" dirty="0" smtClean="0">
+                <a:latin typeface="Times New Roman" pitchFamily="18" charset="0"/>
+                <a:cs typeface="Times New Roman" pitchFamily="18" charset="0"/>
+              </a:rPr>
+              <a:t> на адресе 192.168.1.10 — он отдаёт сайт магазина.</a:t>
+            </a:r>
+          </a:p>
+          <a:p>
+            <a:pPr algn="just"/>
+            <a:r>
+              <a:rPr lang="ru-RU" sz="2000" dirty="0" smtClean="0">
+                <a:latin typeface="Times New Roman" pitchFamily="18" charset="0"/>
+                <a:cs typeface="Times New Roman" pitchFamily="18" charset="0"/>
+              </a:rPr>
+              <a:t>    У провайдера им выдали один публичный IP, например 203.0.113.10.</a:t>
+            </a:r>
+          </a:p>
+          <a:p>
+            <a:pPr algn="just"/>
+            <a:r>
+              <a:rPr lang="ru-RU" sz="2000" dirty="0" smtClean="0">
+                <a:latin typeface="Times New Roman" pitchFamily="18" charset="0"/>
+                <a:cs typeface="Times New Roman" pitchFamily="18" charset="0"/>
+              </a:rPr>
+              <a:t>    Клиенты заходят на сайт по этому публичному IP.</a:t>
+            </a:r>
+          </a:p>
+          <a:p>
+            <a:pPr algn="just"/>
+            <a:r>
+              <a:rPr lang="ru-RU" sz="2000" dirty="0" smtClean="0">
+                <a:latin typeface="Times New Roman" pitchFamily="18" charset="0"/>
+                <a:cs typeface="Times New Roman" pitchFamily="18" charset="0"/>
+              </a:rPr>
+              <a:t>Администратор настраивает на пограничном роутере статический NAT: «запросы на 203.0.113.10 отправляй на 192.168.1.10». Теперь:</a:t>
+            </a:r>
+          </a:p>
+          <a:p>
+            <a:pPr algn="just"/>
+            <a:r>
+              <a:rPr lang="ru-RU" sz="2000" dirty="0" smtClean="0">
+                <a:latin typeface="Times New Roman" pitchFamily="18" charset="0"/>
+                <a:cs typeface="Times New Roman" pitchFamily="18" charset="0"/>
+              </a:rPr>
+              <a:t>    Клиент из интернета видит только 203.0.113.10 и открывает сайт.</a:t>
+            </a:r>
+          </a:p>
+          <a:p>
+            <a:pPr algn="just"/>
+            <a:r>
+              <a:rPr lang="ru-RU" sz="2000" dirty="0" smtClean="0">
+                <a:latin typeface="Times New Roman" pitchFamily="18" charset="0"/>
+                <a:cs typeface="Times New Roman" pitchFamily="18" charset="0"/>
+              </a:rPr>
+              <a:t>    Внутри офиса никто не менял настройки сервера.</a:t>
+            </a:r>
+          </a:p>
+          <a:p>
+            <a:pPr algn="just"/>
+            <a:r>
+              <a:rPr lang="ru-RU" sz="2000" dirty="0" smtClean="0">
+                <a:latin typeface="Times New Roman" pitchFamily="18" charset="0"/>
+                <a:cs typeface="Times New Roman" pitchFamily="18" charset="0"/>
+              </a:rPr>
+              <a:t>    Если завтра сервер переедет на другой внутренний IP, администратор просто поменяет правило на роутере, и снаружи ничего не изменится.</a:t>
+            </a:r>
+          </a:p>
+        </p:txBody>
+      </p:sp>
+    </p:spTree>
+    <p:extLst>
+      <p:ext uri="{BB962C8B-B14F-4D97-AF65-F5344CB8AC3E}">
+        <p14:creationId xmlns:p14="http://schemas.microsoft.com/office/powerpoint/2010/main" val="3459101761"/>
+      </p:ext>
+    </p:extLst>
+  </p:cSld>
+  <p:clrMapOvr>
+    <a:masterClrMapping/>
+  </p:clrMapOvr>
+</p:sld>
+</file>
+
+<file path=ppt/slides/slide4.xml><?xml version="1.0" encoding="utf-8"?>
+<p:sld xmlns:a="http://schemas.openxmlformats.org/drawingml/2006/main" xmlns:r="http://schemas.openxmlformats.org/officeDocument/2006/relationships" xmlns:p="http://schemas.openxmlformats.org/presentationml/2006/main">
+  <p:cSld>
+    <p:spTree>
+      <p:nvGrpSpPr>
+        <p:cNvPr id="1" name=""/>
+        <p:cNvGrpSpPr/>
+        <p:nvPr/>
+      </p:nvGrpSpPr>
+      <p:grpSpPr>
+        <a:xfrm>
+          <a:off x="0" y="0"/>
+          <a:ext cx="0" cy="0"/>
+          <a:chOff x="0" y="0"/>
+          <a:chExt cx="0" cy="0"/>
+        </a:xfrm>
+      </p:grpSpPr>
+      <p:sp>
+        <p:nvSpPr>
+          <p:cNvPr id="2" name="Прямоугольник 1"/>
+          <p:cNvSpPr/>
+          <p:nvPr/>
+        </p:nvSpPr>
+        <p:spPr>
+          <a:xfrm>
+            <a:off x="0" y="0"/>
+            <a:ext cx="12192000" cy="4154984"/>
+          </a:xfrm>
+          <a:prstGeom prst="rect">
+            <a:avLst/>
+          </a:prstGeom>
+        </p:spPr>
+        <p:txBody>
+          <a:bodyPr wrap="square">
+            <a:spAutoFit/>
+          </a:bodyPr>
+          <a:lstStyle/>
+          <a:p>
+            <a:pPr algn="ctr"/>
+            <a:r>
+              <a:rPr lang="ru-RU" sz="2200" b="1" dirty="0" smtClean="0">
+                <a:solidFill>
+                  <a:srgbClr val="FF0000"/>
+                </a:solidFill>
+                <a:latin typeface="Times New Roman" pitchFamily="18" charset="0"/>
+                <a:cs typeface="Times New Roman" pitchFamily="18" charset="0"/>
+              </a:rPr>
+              <a:t>Задание 2</a:t>
+            </a:r>
+            <a:endParaRPr lang="ru-RU" sz="2200" b="1" dirty="0" smtClean="0">
+              <a:solidFill>
+                <a:srgbClr val="FF0000"/>
+              </a:solidFill>
+              <a:latin typeface="Times New Roman" pitchFamily="18" charset="0"/>
+              <a:cs typeface="Times New Roman" pitchFamily="18" charset="0"/>
+            </a:endParaRPr>
+          </a:p>
+          <a:p>
+            <a:pPr algn="just"/>
+            <a:r>
+              <a:rPr lang="ru-RU" sz="2200" dirty="0" smtClean="0">
+                <a:latin typeface="Times New Roman" pitchFamily="18" charset="0"/>
+                <a:cs typeface="Times New Roman" pitchFamily="18" charset="0"/>
+              </a:rPr>
+              <a:t>Трансляция </a:t>
+            </a:r>
+            <a:r>
+              <a:rPr lang="ru-RU" sz="2200" dirty="0">
+                <a:latin typeface="Times New Roman" pitchFamily="18" charset="0"/>
+                <a:cs typeface="Times New Roman" pitchFamily="18" charset="0"/>
+              </a:rPr>
+              <a:t>«многие ко многим» вместо «один к одному». В отличие от статического NAT, здесь не нужно вручную прописывать соответствие каждого внутреннего IP внешнему. Роутер сам назначает свободные адреса из пула (209.165.201.5–7) для исходящих соединений.</a:t>
+            </a:r>
+          </a:p>
+          <a:p>
+            <a:pPr algn="just"/>
+            <a:r>
+              <a:rPr lang="ru-RU" sz="2200" dirty="0">
+                <a:latin typeface="Times New Roman" pitchFamily="18" charset="0"/>
+                <a:cs typeface="Times New Roman" pitchFamily="18" charset="0"/>
+              </a:rPr>
+              <a:t>Роль ACL. Список доступа (</a:t>
+            </a:r>
+            <a:r>
+              <a:rPr lang="ru-RU" sz="2200" dirty="0" err="1">
+                <a:latin typeface="Times New Roman" pitchFamily="18" charset="0"/>
+                <a:cs typeface="Times New Roman" pitchFamily="18" charset="0"/>
+              </a:rPr>
+              <a:t>access-list</a:t>
+            </a:r>
+            <a:r>
+              <a:rPr lang="ru-RU" sz="2200" dirty="0">
+                <a:latin typeface="Times New Roman" pitchFamily="18" charset="0"/>
+                <a:cs typeface="Times New Roman" pitchFamily="18" charset="0"/>
+              </a:rPr>
+              <a:t> 1 </a:t>
+            </a:r>
+            <a:r>
+              <a:rPr lang="ru-RU" sz="2200" dirty="0" err="1">
+                <a:latin typeface="Times New Roman" pitchFamily="18" charset="0"/>
+                <a:cs typeface="Times New Roman" pitchFamily="18" charset="0"/>
+              </a:rPr>
+              <a:t>permit</a:t>
+            </a:r>
+            <a:r>
+              <a:rPr lang="ru-RU" sz="2200" dirty="0">
+                <a:latin typeface="Times New Roman" pitchFamily="18" charset="0"/>
+                <a:cs typeface="Times New Roman" pitchFamily="18" charset="0"/>
+              </a:rPr>
+              <a:t> 192.168.2.0 0.0.0.255) говорит роутеру: «Только этот диапазон может использовать NAT». Это контроль и безопасность.</a:t>
+            </a:r>
+          </a:p>
+          <a:p>
+            <a:pPr algn="just"/>
+            <a:r>
+              <a:rPr lang="ru-RU" sz="2200" dirty="0">
+                <a:latin typeface="Times New Roman" pitchFamily="18" charset="0"/>
+                <a:cs typeface="Times New Roman" pitchFamily="18" charset="0"/>
+              </a:rPr>
+              <a:t>Пул адресов. Команда </a:t>
+            </a:r>
+            <a:r>
+              <a:rPr lang="ru-RU" sz="2200" dirty="0" err="1">
+                <a:latin typeface="Times New Roman" pitchFamily="18" charset="0"/>
+                <a:cs typeface="Times New Roman" pitchFamily="18" charset="0"/>
+              </a:rPr>
+              <a:t>ip</a:t>
+            </a:r>
+            <a:r>
+              <a:rPr lang="ru-RU" sz="2200" dirty="0">
+                <a:latin typeface="Times New Roman" pitchFamily="18" charset="0"/>
+                <a:cs typeface="Times New Roman" pitchFamily="18" charset="0"/>
+              </a:rPr>
+              <a:t> </a:t>
+            </a:r>
+            <a:r>
+              <a:rPr lang="ru-RU" sz="2200" dirty="0" err="1">
+                <a:latin typeface="Times New Roman" pitchFamily="18" charset="0"/>
+                <a:cs typeface="Times New Roman" pitchFamily="18" charset="0"/>
+              </a:rPr>
+              <a:t>nat</a:t>
+            </a:r>
+            <a:r>
+              <a:rPr lang="ru-RU" sz="2200" dirty="0">
+                <a:latin typeface="Times New Roman" pitchFamily="18" charset="0"/>
+                <a:cs typeface="Times New Roman" pitchFamily="18" charset="0"/>
+              </a:rPr>
+              <a:t> </a:t>
+            </a:r>
+            <a:r>
+              <a:rPr lang="ru-RU" sz="2200" dirty="0" err="1">
+                <a:latin typeface="Times New Roman" pitchFamily="18" charset="0"/>
+                <a:cs typeface="Times New Roman" pitchFamily="18" charset="0"/>
+              </a:rPr>
+              <a:t>pool</a:t>
+            </a:r>
+            <a:r>
+              <a:rPr lang="ru-RU" sz="2200" dirty="0">
+                <a:latin typeface="Times New Roman" pitchFamily="18" charset="0"/>
+                <a:cs typeface="Times New Roman" pitchFamily="18" charset="0"/>
+              </a:rPr>
+              <a:t> INTERNET 209.165.201.5 209.165.201.7 задаёт ограниченный набор публичных адресов — имитацию дорогой и дефицитной публичной адресного пространства.</a:t>
+            </a:r>
+          </a:p>
+          <a:p>
+            <a:pPr algn="just"/>
+            <a:r>
+              <a:rPr lang="ru-RU" sz="2200" dirty="0">
+                <a:latin typeface="Times New Roman" pitchFamily="18" charset="0"/>
+                <a:cs typeface="Times New Roman" pitchFamily="18" charset="0"/>
+              </a:rPr>
+              <a:t>Метки интерфейсов. </a:t>
+            </a:r>
+            <a:r>
+              <a:rPr lang="ru-RU" sz="2200" dirty="0" err="1">
+                <a:latin typeface="Times New Roman" pitchFamily="18" charset="0"/>
+                <a:cs typeface="Times New Roman" pitchFamily="18" charset="0"/>
+              </a:rPr>
+              <a:t>ip</a:t>
+            </a:r>
+            <a:r>
+              <a:rPr lang="ru-RU" sz="2200" dirty="0">
+                <a:latin typeface="Times New Roman" pitchFamily="18" charset="0"/>
+                <a:cs typeface="Times New Roman" pitchFamily="18" charset="0"/>
+              </a:rPr>
+              <a:t> </a:t>
+            </a:r>
+            <a:r>
+              <a:rPr lang="ru-RU" sz="2200" dirty="0" err="1">
+                <a:latin typeface="Times New Roman" pitchFamily="18" charset="0"/>
+                <a:cs typeface="Times New Roman" pitchFamily="18" charset="0"/>
+              </a:rPr>
+              <a:t>nat</a:t>
+            </a:r>
+            <a:r>
+              <a:rPr lang="ru-RU" sz="2200" dirty="0">
+                <a:latin typeface="Times New Roman" pitchFamily="18" charset="0"/>
+                <a:cs typeface="Times New Roman" pitchFamily="18" charset="0"/>
+              </a:rPr>
+              <a:t> </a:t>
+            </a:r>
+            <a:r>
+              <a:rPr lang="ru-RU" sz="2200" dirty="0" err="1">
+                <a:latin typeface="Times New Roman" pitchFamily="18" charset="0"/>
+                <a:cs typeface="Times New Roman" pitchFamily="18" charset="0"/>
+              </a:rPr>
+              <a:t>inside</a:t>
+            </a:r>
+            <a:r>
+              <a:rPr lang="ru-RU" sz="2200" dirty="0">
+                <a:latin typeface="Times New Roman" pitchFamily="18" charset="0"/>
+                <a:cs typeface="Times New Roman" pitchFamily="18" charset="0"/>
+              </a:rPr>
+              <a:t> (G0/0) и </a:t>
+            </a:r>
+            <a:r>
+              <a:rPr lang="ru-RU" sz="2200" dirty="0" err="1">
+                <a:latin typeface="Times New Roman" pitchFamily="18" charset="0"/>
+                <a:cs typeface="Times New Roman" pitchFamily="18" charset="0"/>
+              </a:rPr>
+              <a:t>ip</a:t>
+            </a:r>
+            <a:r>
+              <a:rPr lang="ru-RU" sz="2200" dirty="0">
+                <a:latin typeface="Times New Roman" pitchFamily="18" charset="0"/>
+                <a:cs typeface="Times New Roman" pitchFamily="18" charset="0"/>
+              </a:rPr>
+              <a:t> </a:t>
+            </a:r>
+            <a:r>
+              <a:rPr lang="ru-RU" sz="2200" dirty="0" err="1">
+                <a:latin typeface="Times New Roman" pitchFamily="18" charset="0"/>
+                <a:cs typeface="Times New Roman" pitchFamily="18" charset="0"/>
+              </a:rPr>
+              <a:t>nat</a:t>
+            </a:r>
+            <a:r>
+              <a:rPr lang="ru-RU" sz="2200" dirty="0">
+                <a:latin typeface="Times New Roman" pitchFamily="18" charset="0"/>
+                <a:cs typeface="Times New Roman" pitchFamily="18" charset="0"/>
+              </a:rPr>
+              <a:t> </a:t>
+            </a:r>
+            <a:r>
+              <a:rPr lang="ru-RU" sz="2200" dirty="0" err="1">
+                <a:latin typeface="Times New Roman" pitchFamily="18" charset="0"/>
+                <a:cs typeface="Times New Roman" pitchFamily="18" charset="0"/>
+              </a:rPr>
+              <a:t>outside</a:t>
+            </a:r>
+            <a:r>
+              <a:rPr lang="ru-RU" sz="2200" dirty="0">
+                <a:latin typeface="Times New Roman" pitchFamily="18" charset="0"/>
+                <a:cs typeface="Times New Roman" pitchFamily="18" charset="0"/>
+              </a:rPr>
+              <a:t> (G0/1) показывают роутеру, где «внутри» и где «снаружи», чтобы корректно менять адреса в пакетах.</a:t>
+            </a:r>
+          </a:p>
+          <a:p>
+            <a:pPr algn="just"/>
+            <a:r>
+              <a:rPr lang="ru-RU" sz="2200" dirty="0">
+                <a:latin typeface="Times New Roman" pitchFamily="18" charset="0"/>
+                <a:cs typeface="Times New Roman" pitchFamily="18" charset="0"/>
+              </a:rPr>
+              <a:t>Динамические записи. При каждом новом соединении роутер создаёт временную запись в таблице NAT; она исчезает после окончания сессии (или по таймауту). Это видно в </a:t>
+            </a:r>
+            <a:r>
+              <a:rPr lang="ru-RU" sz="2200" dirty="0" err="1">
+                <a:latin typeface="Times New Roman" pitchFamily="18" charset="0"/>
+                <a:cs typeface="Times New Roman" pitchFamily="18" charset="0"/>
+              </a:rPr>
+              <a:t>show</a:t>
+            </a:r>
+            <a:r>
+              <a:rPr lang="ru-RU" sz="2200" dirty="0">
+                <a:latin typeface="Times New Roman" pitchFamily="18" charset="0"/>
+                <a:cs typeface="Times New Roman" pitchFamily="18" charset="0"/>
+              </a:rPr>
+              <a:t> </a:t>
+            </a:r>
+            <a:r>
+              <a:rPr lang="ru-RU" sz="2200" dirty="0" err="1">
+                <a:latin typeface="Times New Roman" pitchFamily="18" charset="0"/>
+                <a:cs typeface="Times New Roman" pitchFamily="18" charset="0"/>
+              </a:rPr>
+              <a:t>ip</a:t>
+            </a:r>
+            <a:r>
+              <a:rPr lang="ru-RU" sz="2200" dirty="0">
+                <a:latin typeface="Times New Roman" pitchFamily="18" charset="0"/>
+                <a:cs typeface="Times New Roman" pitchFamily="18" charset="0"/>
+              </a:rPr>
+              <a:t> </a:t>
+            </a:r>
+            <a:r>
+              <a:rPr lang="ru-RU" sz="2200" dirty="0" err="1">
+                <a:latin typeface="Times New Roman" pitchFamily="18" charset="0"/>
+                <a:cs typeface="Times New Roman" pitchFamily="18" charset="0"/>
+              </a:rPr>
+              <a:t>nat</a:t>
+            </a:r>
+            <a:r>
+              <a:rPr lang="ru-RU" sz="2200" dirty="0">
+                <a:latin typeface="Times New Roman" pitchFamily="18" charset="0"/>
+                <a:cs typeface="Times New Roman" pitchFamily="18" charset="0"/>
+              </a:rPr>
+              <a:t> </a:t>
+            </a:r>
+            <a:r>
+              <a:rPr lang="ru-RU" sz="2200" dirty="0" err="1">
+                <a:latin typeface="Times New Roman" pitchFamily="18" charset="0"/>
+                <a:cs typeface="Times New Roman" pitchFamily="18" charset="0"/>
+              </a:rPr>
+              <a:t>translations</a:t>
+            </a:r>
+            <a:r>
+              <a:rPr lang="ru-RU" sz="2200" dirty="0" smtClean="0">
+                <a:latin typeface="Times New Roman" pitchFamily="18" charset="0"/>
+                <a:cs typeface="Times New Roman" pitchFamily="18" charset="0"/>
+              </a:rPr>
+              <a:t>.</a:t>
+            </a:r>
+            <a:endParaRPr lang="ru-RU" sz="2200" dirty="0">
+              <a:latin typeface="Times New Roman" pitchFamily="18" charset="0"/>
+              <a:cs typeface="Times New Roman" pitchFamily="18" charset="0"/>
+            </a:endParaRPr>
+          </a:p>
+        </p:txBody>
+      </p:sp>
+      <p:pic>
+        <p:nvPicPr>
+          <p:cNvPr id="5" name="Рисунок 4"/>
+          <p:cNvPicPr>
+            <a:picLocks noChangeAspect="1"/>
+          </p:cNvPicPr>
+          <p:nvPr/>
+        </p:nvPicPr>
+        <p:blipFill>
+          <a:blip r:embed="rId2"/>
+          <a:stretch>
+            <a:fillRect/>
+          </a:stretch>
+        </p:blipFill>
+        <p:spPr>
+          <a:xfrm>
+            <a:off x="0" y="5674730"/>
+            <a:ext cx="8888284" cy="1183270"/>
+          </a:xfrm>
+          <a:prstGeom prst="rect">
+            <a:avLst/>
+          </a:prstGeom>
+        </p:spPr>
+      </p:pic>
+      <p:pic>
+        <p:nvPicPr>
+          <p:cNvPr id="6" name="Рисунок 5"/>
+          <p:cNvPicPr>
+            <a:picLocks noChangeAspect="1"/>
+          </p:cNvPicPr>
+          <p:nvPr/>
+        </p:nvPicPr>
+        <p:blipFill>
+          <a:blip r:embed="rId3"/>
+          <a:stretch>
+            <a:fillRect/>
+          </a:stretch>
+        </p:blipFill>
+        <p:spPr>
+          <a:xfrm>
+            <a:off x="9190298" y="4191684"/>
+            <a:ext cx="3001701" cy="2666315"/>
+          </a:xfrm>
+          <a:prstGeom prst="rect">
+            <a:avLst/>
+          </a:prstGeom>
+        </p:spPr>
+      </p:pic>
+      <p:pic>
+        <p:nvPicPr>
+          <p:cNvPr id="7" name="Рисунок 6"/>
+          <p:cNvPicPr>
+            <a:picLocks noChangeAspect="1"/>
+          </p:cNvPicPr>
+          <p:nvPr/>
+        </p:nvPicPr>
+        <p:blipFill>
+          <a:blip r:embed="rId4"/>
+          <a:stretch>
+            <a:fillRect/>
+          </a:stretch>
+        </p:blipFill>
+        <p:spPr>
+          <a:xfrm>
+            <a:off x="744880" y="4103105"/>
+            <a:ext cx="6743700" cy="1571625"/>
+          </a:xfrm>
+          <a:prstGeom prst="rect">
+            <a:avLst/>
+          </a:prstGeom>
+        </p:spPr>
+      </p:pic>
+    </p:spTree>
+    <p:extLst>
+      <p:ext uri="{BB962C8B-B14F-4D97-AF65-F5344CB8AC3E}">
+        <p14:creationId xmlns:p14="http://schemas.microsoft.com/office/powerpoint/2010/main" val="1311464811"/>
+      </p:ext>
+    </p:extLst>
+  </p:cSld>
+  <p:clrMapOvr>
+    <a:masterClrMapping/>
+  </p:clrMapOvr>
+</p:sld>
+</file>
+
+<file path=ppt/slides/slide5.xml><?xml version="1.0" encoding="utf-8"?>
+<p:sld xmlns:a="http://schemas.openxmlformats.org/drawingml/2006/main" xmlns:r="http://schemas.openxmlformats.org/officeDocument/2006/relationships" xmlns:p="http://schemas.openxmlformats.org/presentationml/2006/main">
+  <p:cSld>
+    <p:spTree>
+      <p:nvGrpSpPr>
+        <p:cNvPr id="1" name=""/>
+        <p:cNvGrpSpPr/>
+        <p:nvPr/>
+      </p:nvGrpSpPr>
+      <p:grpSpPr>
+        <a:xfrm>
+          <a:off x="0" y="0"/>
+          <a:ext cx="0" cy="0"/>
+          <a:chOff x="0" y="0"/>
+          <a:chExt cx="0" cy="0"/>
+        </a:xfrm>
+      </p:grpSpPr>
+      <p:sp>
+        <p:nvSpPr>
+          <p:cNvPr id="2" name="Прямоугольник 1"/>
+          <p:cNvSpPr/>
+          <p:nvPr/>
+        </p:nvSpPr>
+        <p:spPr>
+          <a:xfrm>
+            <a:off x="0" y="0"/>
+            <a:ext cx="12192000" cy="6247864"/>
+          </a:xfrm>
+          <a:prstGeom prst="rect">
+            <a:avLst/>
+          </a:prstGeom>
+        </p:spPr>
+        <p:txBody>
+          <a:bodyPr wrap="square">
+            <a:spAutoFit/>
+          </a:bodyPr>
+          <a:lstStyle/>
+          <a:p>
+            <a:pPr algn="ctr"/>
+            <a:r>
+              <a:rPr lang="ru-RU" sz="2000" b="1" dirty="0">
+                <a:latin typeface="Times New Roman" pitchFamily="18" charset="0"/>
+                <a:cs typeface="Times New Roman" pitchFamily="18" charset="0"/>
+              </a:rPr>
+              <a:t>В чём польза (практический смысл)</a:t>
+            </a:r>
+          </a:p>
+          <a:p>
+            <a:pPr algn="just"/>
+            <a:r>
+              <a:rPr lang="ru-RU" sz="2000" dirty="0">
+                <a:latin typeface="Times New Roman" pitchFamily="18" charset="0"/>
+                <a:cs typeface="Times New Roman" pitchFamily="18" charset="0"/>
+              </a:rPr>
+              <a:t>Экономия публичных IP‑адресов. В реальной сети публичных адресов мало и они стоят денег. Динамический NAT позволяет десяткам или сотням устройств в локальной сети выходить в интернет через небольшой пул внешних адресов.</a:t>
+            </a:r>
+          </a:p>
+          <a:p>
+            <a:pPr algn="just"/>
+            <a:r>
+              <a:rPr lang="ru-RU" sz="2000" dirty="0">
+                <a:latin typeface="Times New Roman" pitchFamily="18" charset="0"/>
+                <a:cs typeface="Times New Roman" pitchFamily="18" charset="0"/>
+              </a:rPr>
+              <a:t>Безопасность за счёт сокрытия. Внутренние адреса (192.168.2.x) не видны снаружи. Внешний мир видит только адреса из пула. Даже если кто‑то «просканирует» публичные адреса, он не узнает реальную адресацию внутренней сети.</a:t>
+            </a:r>
+          </a:p>
+          <a:p>
+            <a:pPr algn="just"/>
+            <a:r>
+              <a:rPr lang="ru-RU" sz="2000" dirty="0">
+                <a:latin typeface="Times New Roman" pitchFamily="18" charset="0"/>
+                <a:cs typeface="Times New Roman" pitchFamily="18" charset="0"/>
+              </a:rPr>
+              <a:t>Упрощённое управление. Не нужно вручную создавать статические правила для каждого устройства. Достаточно одного пула и одного ACL.</a:t>
+            </a:r>
+          </a:p>
+          <a:p>
+            <a:pPr algn="just"/>
+            <a:r>
+              <a:rPr lang="ru-RU" sz="2000" dirty="0">
+                <a:latin typeface="Times New Roman" pitchFamily="18" charset="0"/>
+                <a:cs typeface="Times New Roman" pitchFamily="18" charset="0"/>
+              </a:rPr>
+              <a:t>Контроль доступа. ACL позволяет явно разрешить выход только нужным подсетям и заблокировать остальной трафик на уровне NAT.</a:t>
+            </a:r>
+          </a:p>
+          <a:p>
+            <a:pPr algn="just"/>
+            <a:r>
+              <a:rPr lang="ru-RU" sz="2000" dirty="0">
+                <a:latin typeface="Times New Roman" pitchFamily="18" charset="0"/>
+                <a:cs typeface="Times New Roman" pitchFamily="18" charset="0"/>
+              </a:rPr>
+              <a:t>Наглядность для обучения. В </a:t>
+            </a:r>
+            <a:r>
+              <a:rPr lang="ru-RU" sz="2000" dirty="0" err="1">
+                <a:latin typeface="Times New Roman" pitchFamily="18" charset="0"/>
+                <a:cs typeface="Times New Roman" pitchFamily="18" charset="0"/>
+              </a:rPr>
+              <a:t>Packet</a:t>
+            </a:r>
+            <a:r>
+              <a:rPr lang="ru-RU" sz="2000" dirty="0">
+                <a:latin typeface="Times New Roman" pitchFamily="18" charset="0"/>
+                <a:cs typeface="Times New Roman" pitchFamily="18" charset="0"/>
+              </a:rPr>
+              <a:t> </a:t>
+            </a:r>
+            <a:r>
+              <a:rPr lang="ru-RU" sz="2000" dirty="0" err="1">
+                <a:latin typeface="Times New Roman" pitchFamily="18" charset="0"/>
+                <a:cs typeface="Times New Roman" pitchFamily="18" charset="0"/>
+              </a:rPr>
+              <a:t>Tracer</a:t>
+            </a:r>
+            <a:r>
+              <a:rPr lang="ru-RU" sz="2000" dirty="0">
+                <a:latin typeface="Times New Roman" pitchFamily="18" charset="0"/>
+                <a:cs typeface="Times New Roman" pitchFamily="18" charset="0"/>
+              </a:rPr>
+              <a:t> ты видишь живые записи в таблице NAT и можешь сопоставить каждое соединение с конкретной парой «внутренний IP → внешний IP из пула».</a:t>
+            </a:r>
+          </a:p>
+          <a:p>
+            <a:pPr algn="ctr"/>
+            <a:r>
+              <a:rPr lang="ru-RU" sz="2000" b="1" dirty="0">
+                <a:latin typeface="Times New Roman" pitchFamily="18" charset="0"/>
+                <a:cs typeface="Times New Roman" pitchFamily="18" charset="0"/>
+              </a:rPr>
+              <a:t>Что, что они успешно выходят «наружу</a:t>
+            </a:r>
+            <a:r>
+              <a:rPr lang="ru-RU" sz="2000" dirty="0">
+                <a:latin typeface="Times New Roman" pitchFamily="18" charset="0"/>
+                <a:cs typeface="Times New Roman" pitchFamily="18" charset="0"/>
+              </a:rPr>
+              <a:t>» и получают ответы.</a:t>
+            </a:r>
+          </a:p>
+          <a:p>
+            <a:pPr algn="just"/>
+            <a:r>
+              <a:rPr lang="ru-RU" sz="2000" dirty="0">
+                <a:latin typeface="Times New Roman" pitchFamily="18" charset="0"/>
+                <a:cs typeface="Times New Roman" pitchFamily="18" charset="0"/>
+              </a:rPr>
+              <a:t>Команда </a:t>
+            </a:r>
+            <a:r>
+              <a:rPr lang="ru-RU" sz="2000" dirty="0" err="1">
+                <a:latin typeface="Times New Roman" pitchFamily="18" charset="0"/>
+                <a:cs typeface="Times New Roman" pitchFamily="18" charset="0"/>
+              </a:rPr>
+              <a:t>show</a:t>
+            </a:r>
+            <a:r>
+              <a:rPr lang="ru-RU" sz="2000" dirty="0">
+                <a:latin typeface="Times New Roman" pitchFamily="18" charset="0"/>
+                <a:cs typeface="Times New Roman" pitchFamily="18" charset="0"/>
+              </a:rPr>
+              <a:t> </a:t>
+            </a:r>
+            <a:r>
+              <a:rPr lang="ru-RU" sz="2000" dirty="0" err="1">
+                <a:latin typeface="Times New Roman" pitchFamily="18" charset="0"/>
+                <a:cs typeface="Times New Roman" pitchFamily="18" charset="0"/>
+              </a:rPr>
+              <a:t>ip</a:t>
+            </a:r>
+            <a:r>
+              <a:rPr lang="ru-RU" sz="2000" dirty="0">
+                <a:latin typeface="Times New Roman" pitchFamily="18" charset="0"/>
+                <a:cs typeface="Times New Roman" pitchFamily="18" charset="0"/>
+              </a:rPr>
+              <a:t> </a:t>
+            </a:r>
+            <a:r>
+              <a:rPr lang="ru-RU" sz="2000" dirty="0" err="1">
+                <a:latin typeface="Times New Roman" pitchFamily="18" charset="0"/>
+                <a:cs typeface="Times New Roman" pitchFamily="18" charset="0"/>
+              </a:rPr>
+              <a:t>nat</a:t>
+            </a:r>
+            <a:r>
+              <a:rPr lang="ru-RU" sz="2000" dirty="0">
+                <a:latin typeface="Times New Roman" pitchFamily="18" charset="0"/>
+                <a:cs typeface="Times New Roman" pitchFamily="18" charset="0"/>
+              </a:rPr>
+              <a:t> </a:t>
+            </a:r>
+            <a:r>
+              <a:rPr lang="ru-RU" sz="2000" dirty="0" err="1">
+                <a:latin typeface="Times New Roman" pitchFamily="18" charset="0"/>
+                <a:cs typeface="Times New Roman" pitchFamily="18" charset="0"/>
+              </a:rPr>
+              <a:t>translations</a:t>
+            </a:r>
+            <a:r>
+              <a:rPr lang="ru-RU" sz="2000" dirty="0">
+                <a:latin typeface="Times New Roman" pitchFamily="18" charset="0"/>
+                <a:cs typeface="Times New Roman" pitchFamily="18" charset="0"/>
+              </a:rPr>
+              <a:t> </a:t>
+            </a:r>
+            <a:r>
+              <a:rPr lang="ru-RU" sz="2000" dirty="0" err="1">
+                <a:latin typeface="Times New Roman" pitchFamily="18" charset="0"/>
+                <a:cs typeface="Times New Roman" pitchFamily="18" charset="0"/>
+              </a:rPr>
+              <a:t>подтдемонстрирует</a:t>
+            </a:r>
+            <a:r>
+              <a:rPr lang="ru-RU" sz="2000" dirty="0">
+                <a:latin typeface="Times New Roman" pitchFamily="18" charset="0"/>
+                <a:cs typeface="Times New Roman" pitchFamily="18" charset="0"/>
+              </a:rPr>
+              <a:t> проверка (вывод)</a:t>
+            </a:r>
+          </a:p>
+          <a:p>
+            <a:pPr algn="just"/>
+            <a:r>
+              <a:rPr lang="ru-RU" sz="2000" dirty="0">
+                <a:latin typeface="Times New Roman" pitchFamily="18" charset="0"/>
+                <a:cs typeface="Times New Roman" pitchFamily="18" charset="0"/>
+              </a:rPr>
+              <a:t>Команда </a:t>
+            </a:r>
+            <a:r>
+              <a:rPr lang="ru-RU" sz="2000" dirty="0" err="1">
+                <a:latin typeface="Times New Roman" pitchFamily="18" charset="0"/>
+                <a:cs typeface="Times New Roman" pitchFamily="18" charset="0"/>
+              </a:rPr>
+              <a:t>ping</a:t>
+            </a:r>
+            <a:r>
+              <a:rPr lang="ru-RU" sz="2000" dirty="0">
+                <a:latin typeface="Times New Roman" pitchFamily="18" charset="0"/>
+                <a:cs typeface="Times New Roman" pitchFamily="18" charset="0"/>
+              </a:rPr>
+              <a:t> с внутренних ПК </a:t>
+            </a:r>
+            <a:r>
+              <a:rPr lang="ru-RU" sz="2000" dirty="0" err="1">
+                <a:latin typeface="Times New Roman" pitchFamily="18" charset="0"/>
+                <a:cs typeface="Times New Roman" pitchFamily="18" charset="0"/>
+              </a:rPr>
+              <a:t>показываетверждает</a:t>
+            </a:r>
+            <a:r>
+              <a:rPr lang="ru-RU" sz="2000" dirty="0">
+                <a:latin typeface="Times New Roman" pitchFamily="18" charset="0"/>
+                <a:cs typeface="Times New Roman" pitchFamily="18" charset="0"/>
+              </a:rPr>
+              <a:t>: роутер действительно подменяет внутренние адреса на адреса из пула, и эти записи появляются и исчезают динамически.</a:t>
+            </a:r>
+          </a:p>
+          <a:p>
+            <a:pPr algn="just"/>
+            <a:r>
+              <a:rPr lang="ru-RU" sz="2000" dirty="0">
+                <a:latin typeface="Times New Roman" pitchFamily="18" charset="0"/>
+                <a:cs typeface="Times New Roman" pitchFamily="18" charset="0"/>
+              </a:rPr>
+              <a:t>Ограниченный размер пула (всего 3 адреса) наглядно показывает, что при одновременном выходе большего числа устройств часть сессий может не установиться — это имитирует реальные ограничения и помогает понять, когда нужен PAT (перегрузка NAT с портами).</a:t>
+            </a:r>
+          </a:p>
+        </p:txBody>
+      </p:sp>
+    </p:spTree>
+    <p:extLst>
+      <p:ext uri="{BB962C8B-B14F-4D97-AF65-F5344CB8AC3E}">
+        <p14:creationId xmlns:p14="http://schemas.microsoft.com/office/powerpoint/2010/main" val="1337820793"/>
+      </p:ext>
+    </p:extLst>
+  </p:cSld>
+  <p:clrMapOvr>
+    <a:masterClrMapping/>
+  </p:clrMapOvr>
+</p:sld>
+</file>
+
+<file path=ppt/slides/slide6.xml><?xml version="1.0" encoding="utf-8"?>
+<p:sld xmlns:a="http://schemas.openxmlformats.org/drawingml/2006/main" xmlns:r="http://schemas.openxmlformats.org/officeDocument/2006/relationships" xmlns:p="http://schemas.openxmlformats.org/presentationml/2006/main">
+  <p:cSld>
+    <p:spTree>
+      <p:nvGrpSpPr>
+        <p:cNvPr id="1" name=""/>
+        <p:cNvGrpSpPr/>
+        <p:nvPr/>
+      </p:nvGrpSpPr>
+      <p:grpSpPr>
+        <a:xfrm>
+          <a:off x="0" y="0"/>
+          <a:ext cx="0" cy="0"/>
+          <a:chOff x="0" y="0"/>
+          <a:chExt cx="0" cy="0"/>
+        </a:xfrm>
+      </p:grpSpPr>
+      <p:graphicFrame>
+        <p:nvGraphicFramePr>
+          <p:cNvPr id="2" name="Таблица 1"/>
+          <p:cNvGraphicFramePr>
+            <a:graphicFrameLocks noGrp="1"/>
+          </p:cNvGraphicFramePr>
+          <p:nvPr>
+            <p:extLst>
+              <p:ext uri="{D42A27DB-BD31-4B8C-83A1-F6EECF244321}">
+                <p14:modId xmlns:p14="http://schemas.microsoft.com/office/powerpoint/2010/main" val="3373254839"/>
+              </p:ext>
+            </p:extLst>
+          </p:nvPr>
+        </p:nvGraphicFramePr>
+        <p:xfrm>
+          <a:off x="0" y="1"/>
+          <a:ext cx="12192000" cy="6925989"/>
+        </p:xfrm>
+        <a:graphic>
+          <a:graphicData uri="http://schemas.openxmlformats.org/drawingml/2006/table">
+            <a:tbl>
+              <a:tblPr firstRow="1" firstCol="1" bandRow="1">
+                <a:tableStyleId>{5C22544A-7EE6-4342-B048-85BDC9FD1C3A}</a:tableStyleId>
+              </a:tblPr>
+              <a:tblGrid>
+                <a:gridCol w="4064000"/>
+                <a:gridCol w="4064000"/>
+                <a:gridCol w="4064000"/>
+              </a:tblGrid>
+              <a:tr h="588855">
+                <a:tc>
+                  <a:txBody>
+                    <a:bodyPr/>
+                    <a:lstStyle/>
+                    <a:p>
+                      <a:pPr algn="just">
+                        <a:lnSpc>
+                          <a:spcPct val="107000"/>
+                        </a:lnSpc>
+                        <a:spcAft>
+                          <a:spcPts val="0"/>
+                        </a:spcAft>
+                      </a:pPr>
+                      <a:r>
+                        <a:rPr lang="ru-RU" sz="2000" dirty="0">
+                          <a:effectLst/>
+                        </a:rPr>
+                        <a:t>Характеристика</a:t>
+                      </a:r>
+                      <a:endParaRPr lang="ru-RU" sz="2000" dirty="0">
+                        <a:effectLst/>
+                        <a:latin typeface="Calibri" panose="020F0502020204030204" pitchFamily="34" charset="0"/>
+                        <a:ea typeface="Calibri" panose="020F0502020204030204" pitchFamily="34" charset="0"/>
+                        <a:cs typeface="Times New Roman" panose="02020603050405020304" pitchFamily="18" charset="0"/>
+                      </a:endParaRPr>
+                    </a:p>
+                  </a:txBody>
+                  <a:tcPr marL="9525" marR="9525" marT="9525" marB="9525" anchor="ctr"/>
+                </a:tc>
+                <a:tc>
+                  <a:txBody>
+                    <a:bodyPr/>
+                    <a:lstStyle/>
+                    <a:p>
+                      <a:pPr algn="just">
+                        <a:lnSpc>
+                          <a:spcPct val="107000"/>
+                        </a:lnSpc>
+                        <a:spcAft>
+                          <a:spcPts val="0"/>
+                        </a:spcAft>
+                      </a:pPr>
+                      <a:r>
+                        <a:rPr lang="ru-RU" sz="2000">
+                          <a:effectLst/>
+                        </a:rPr>
+                        <a:t>Динамический NAT</a:t>
+                      </a:r>
+                      <a:endParaRPr lang="ru-RU" sz="2000">
+                        <a:effectLst/>
+                        <a:latin typeface="Calibri" panose="020F0502020204030204" pitchFamily="34" charset="0"/>
+                        <a:ea typeface="Calibri" panose="020F0502020204030204" pitchFamily="34" charset="0"/>
+                        <a:cs typeface="Times New Roman" panose="02020603050405020304" pitchFamily="18" charset="0"/>
+                      </a:endParaRPr>
+                    </a:p>
+                  </a:txBody>
+                  <a:tcPr marL="9525" marR="9525" marT="9525" marB="9525" anchor="ctr"/>
+                </a:tc>
+                <a:tc>
+                  <a:txBody>
+                    <a:bodyPr/>
+                    <a:lstStyle/>
+                    <a:p>
+                      <a:pPr algn="just">
+                        <a:lnSpc>
+                          <a:spcPct val="107000"/>
+                        </a:lnSpc>
+                        <a:spcAft>
+                          <a:spcPts val="0"/>
+                        </a:spcAft>
+                      </a:pPr>
+                      <a:r>
+                        <a:rPr lang="ru-RU" sz="2000">
+                          <a:effectLst/>
+                        </a:rPr>
+                        <a:t>PAT / NAT Overload</a:t>
+                      </a:r>
+                      <a:endParaRPr lang="ru-RU" sz="2000">
+                        <a:effectLst/>
+                        <a:latin typeface="Calibri" panose="020F0502020204030204" pitchFamily="34" charset="0"/>
+                        <a:ea typeface="Calibri" panose="020F0502020204030204" pitchFamily="34" charset="0"/>
+                        <a:cs typeface="Times New Roman" panose="02020603050405020304" pitchFamily="18" charset="0"/>
+                      </a:endParaRPr>
+                    </a:p>
+                  </a:txBody>
+                  <a:tcPr marL="9525" marR="9525" marT="9525" marB="9525" anchor="ctr"/>
+                </a:tc>
+              </a:tr>
+              <a:tr h="1707062">
+                <a:tc>
+                  <a:txBody>
+                    <a:bodyPr/>
+                    <a:lstStyle/>
+                    <a:p>
+                      <a:pPr algn="just">
+                        <a:lnSpc>
+                          <a:spcPct val="107000"/>
+                        </a:lnSpc>
+                        <a:spcAft>
+                          <a:spcPts val="0"/>
+                        </a:spcAft>
+                      </a:pPr>
+                      <a:r>
+                        <a:rPr lang="ru-RU" sz="2000">
+                          <a:effectLst/>
+                        </a:rPr>
+                        <a:t>Соотношение адресов</a:t>
+                      </a:r>
+                      <a:endParaRPr lang="ru-RU" sz="2000">
+                        <a:effectLst/>
+                        <a:latin typeface="Calibri" panose="020F0502020204030204" pitchFamily="34" charset="0"/>
+                        <a:ea typeface="Calibri" panose="020F0502020204030204" pitchFamily="34" charset="0"/>
+                        <a:cs typeface="Times New Roman" panose="02020603050405020304" pitchFamily="18" charset="0"/>
+                      </a:endParaRPr>
+                    </a:p>
+                  </a:txBody>
+                  <a:tcPr marL="9525" marR="9525" marT="9525" marB="9525" anchor="ctr"/>
+                </a:tc>
+                <a:tc>
+                  <a:txBody>
+                    <a:bodyPr/>
+                    <a:lstStyle/>
+                    <a:p>
+                      <a:pPr algn="just">
+                        <a:lnSpc>
+                          <a:spcPct val="107000"/>
+                        </a:lnSpc>
+                        <a:spcAft>
+                          <a:spcPts val="0"/>
+                        </a:spcAft>
+                      </a:pPr>
+                      <a:r>
+                        <a:rPr lang="ru-RU" sz="2000" dirty="0">
+                          <a:effectLst/>
+                        </a:rPr>
+                        <a:t>«Многие ко многим» (но ограничено пулом). Например, 100 устройств могут выходить в интернет, только если у тебя есть 100 публичных IP.</a:t>
+                      </a:r>
+                      <a:endParaRPr lang="ru-RU" sz="2000" dirty="0">
+                        <a:effectLst/>
+                        <a:latin typeface="Calibri" panose="020F0502020204030204" pitchFamily="34" charset="0"/>
+                        <a:ea typeface="Calibri" panose="020F0502020204030204" pitchFamily="34" charset="0"/>
+                        <a:cs typeface="Times New Roman" panose="02020603050405020304" pitchFamily="18" charset="0"/>
+                      </a:endParaRPr>
+                    </a:p>
+                  </a:txBody>
+                  <a:tcPr marL="9525" marR="9525" marT="9525" marB="9525" anchor="ctr"/>
+                </a:tc>
+                <a:tc>
+                  <a:txBody>
+                    <a:bodyPr/>
+                    <a:lstStyle/>
+                    <a:p>
+                      <a:pPr algn="just">
+                        <a:lnSpc>
+                          <a:spcPct val="107000"/>
+                        </a:lnSpc>
+                        <a:spcAft>
+                          <a:spcPts val="0"/>
+                        </a:spcAft>
+                      </a:pPr>
+                      <a:r>
+                        <a:rPr lang="ru-RU" sz="2000">
+                          <a:effectLst/>
+                        </a:rPr>
+                        <a:t>«Многие к одному». Сотни или тысячи устройств могут выходить через один-единственный публичный IP.</a:t>
+                      </a:r>
+                      <a:endParaRPr lang="ru-RU" sz="2000">
+                        <a:effectLst/>
+                        <a:latin typeface="Calibri" panose="020F0502020204030204" pitchFamily="34" charset="0"/>
+                        <a:ea typeface="Calibri" panose="020F0502020204030204" pitchFamily="34" charset="0"/>
+                        <a:cs typeface="Times New Roman" panose="02020603050405020304" pitchFamily="18" charset="0"/>
+                      </a:endParaRPr>
+                    </a:p>
+                  </a:txBody>
+                  <a:tcPr marL="9525" marR="9525" marT="9525" marB="9525" anchor="ctr"/>
+                </a:tc>
+              </a:tr>
+              <a:tr h="1707062">
+                <a:tc>
+                  <a:txBody>
+                    <a:bodyPr/>
+                    <a:lstStyle/>
+                    <a:p>
+                      <a:pPr algn="just">
+                        <a:lnSpc>
+                          <a:spcPct val="107000"/>
+                        </a:lnSpc>
+                        <a:spcAft>
+                          <a:spcPts val="0"/>
+                        </a:spcAft>
+                      </a:pPr>
+                      <a:r>
+                        <a:rPr lang="ru-RU" sz="2000">
+                          <a:effectLst/>
+                        </a:rPr>
+                        <a:t>Что меняется в пакете</a:t>
+                      </a:r>
+                      <a:endParaRPr lang="ru-RU" sz="2000">
+                        <a:effectLst/>
+                        <a:latin typeface="Calibri" panose="020F0502020204030204" pitchFamily="34" charset="0"/>
+                        <a:ea typeface="Calibri" panose="020F0502020204030204" pitchFamily="34" charset="0"/>
+                        <a:cs typeface="Times New Roman" panose="02020603050405020304" pitchFamily="18" charset="0"/>
+                      </a:endParaRPr>
+                    </a:p>
+                  </a:txBody>
+                  <a:tcPr marL="9525" marR="9525" marT="9525" marB="9525" anchor="ctr"/>
+                </a:tc>
+                <a:tc>
+                  <a:txBody>
+                    <a:bodyPr/>
+                    <a:lstStyle/>
+                    <a:p>
+                      <a:pPr algn="just">
+                        <a:lnSpc>
+                          <a:spcPct val="107000"/>
+                        </a:lnSpc>
+                        <a:spcAft>
+                          <a:spcPts val="0"/>
+                        </a:spcAft>
+                      </a:pPr>
+                      <a:r>
+                        <a:rPr lang="ru-RU" sz="2000">
+                          <a:effectLst/>
+                        </a:rPr>
+                        <a:t>Только IP-адрес источника. Порт остаётся тем же, что был у устройства.</a:t>
+                      </a:r>
+                      <a:endParaRPr lang="ru-RU" sz="2000">
+                        <a:effectLst/>
+                        <a:latin typeface="Calibri" panose="020F0502020204030204" pitchFamily="34" charset="0"/>
+                        <a:ea typeface="Calibri" panose="020F0502020204030204" pitchFamily="34" charset="0"/>
+                        <a:cs typeface="Times New Roman" panose="02020603050405020304" pitchFamily="18" charset="0"/>
+                      </a:endParaRPr>
+                    </a:p>
+                  </a:txBody>
+                  <a:tcPr marL="9525" marR="9525" marT="9525" marB="9525" anchor="ctr"/>
+                </a:tc>
+                <a:tc>
+                  <a:txBody>
+                    <a:bodyPr/>
+                    <a:lstStyle/>
+                    <a:p>
+                      <a:pPr algn="just">
+                        <a:lnSpc>
+                          <a:spcPct val="107000"/>
+                        </a:lnSpc>
+                        <a:spcAft>
+                          <a:spcPts val="0"/>
+                        </a:spcAft>
+                      </a:pPr>
+                      <a:r>
+                        <a:rPr lang="ru-RU" sz="2000">
+                          <a:effectLst/>
+                        </a:rPr>
+                        <a:t>Меняется и IP-адрес, и порт источника. Роутер подменяет внутренний порт на свой случайный высокий порт (например, 1025, 48901 и т.д.).</a:t>
+                      </a:r>
+                      <a:endParaRPr lang="ru-RU" sz="2000">
+                        <a:effectLst/>
+                        <a:latin typeface="Calibri" panose="020F0502020204030204" pitchFamily="34" charset="0"/>
+                        <a:ea typeface="Calibri" panose="020F0502020204030204" pitchFamily="34" charset="0"/>
+                        <a:cs typeface="Times New Roman" panose="02020603050405020304" pitchFamily="18" charset="0"/>
+                      </a:endParaRPr>
+                    </a:p>
+                  </a:txBody>
+                  <a:tcPr marL="9525" marR="9525" marT="9525" marB="9525" anchor="ctr"/>
+                </a:tc>
+              </a:tr>
+              <a:tr h="2266166">
+                <a:tc>
+                  <a:txBody>
+                    <a:bodyPr/>
+                    <a:lstStyle/>
+                    <a:p>
+                      <a:pPr algn="just">
+                        <a:lnSpc>
+                          <a:spcPct val="107000"/>
+                        </a:lnSpc>
+                        <a:spcAft>
+                          <a:spcPts val="0"/>
+                        </a:spcAft>
+                      </a:pPr>
+                      <a:r>
+                        <a:rPr lang="ru-RU" sz="2000">
+                          <a:effectLst/>
+                        </a:rPr>
+                        <a:t>Как работает таблица NAT</a:t>
+                      </a:r>
+                      <a:endParaRPr lang="ru-RU" sz="2000">
+                        <a:effectLst/>
+                        <a:latin typeface="Calibri" panose="020F0502020204030204" pitchFamily="34" charset="0"/>
+                        <a:ea typeface="Calibri" panose="020F0502020204030204" pitchFamily="34" charset="0"/>
+                        <a:cs typeface="Times New Roman" panose="02020603050405020304" pitchFamily="18" charset="0"/>
+                      </a:endParaRPr>
+                    </a:p>
+                  </a:txBody>
+                  <a:tcPr marL="9525" marR="9525" marT="9525" marB="9525" anchor="ctr"/>
+                </a:tc>
+                <a:tc>
+                  <a:txBody>
+                    <a:bodyPr/>
+                    <a:lstStyle/>
+                    <a:p>
+                      <a:pPr algn="just">
+                        <a:lnSpc>
+                          <a:spcPct val="107000"/>
+                        </a:lnSpc>
+                        <a:spcAft>
+                          <a:spcPts val="0"/>
+                        </a:spcAft>
+                      </a:pPr>
+                      <a:r>
+                        <a:rPr lang="ru-RU" sz="2000">
+                          <a:effectLst/>
+                        </a:rPr>
+                        <a:t>В таблице хранится пара: Внутренний IP ↔ Внешний IP.</a:t>
+                      </a:r>
+                      <a:endParaRPr lang="ru-RU" sz="2000">
+                        <a:effectLst/>
+                        <a:latin typeface="Calibri" panose="020F0502020204030204" pitchFamily="34" charset="0"/>
+                        <a:ea typeface="Calibri" panose="020F0502020204030204" pitchFamily="34" charset="0"/>
+                        <a:cs typeface="Times New Roman" panose="02020603050405020304" pitchFamily="18" charset="0"/>
+                      </a:endParaRPr>
+                    </a:p>
+                  </a:txBody>
+                  <a:tcPr marL="9525" marR="9525" marT="9525" marB="9525" anchor="ctr"/>
+                </a:tc>
+                <a:tc>
+                  <a:txBody>
+                    <a:bodyPr/>
+                    <a:lstStyle/>
+                    <a:p>
+                      <a:pPr algn="just">
+                        <a:lnSpc>
+                          <a:spcPct val="107000"/>
+                        </a:lnSpc>
+                        <a:spcAft>
+                          <a:spcPts val="0"/>
+                        </a:spcAft>
+                      </a:pPr>
+                      <a:r>
+                        <a:rPr lang="ru-RU" sz="2000">
+                          <a:effectLst/>
+                        </a:rPr>
+                        <a:t>В таблице хранится тройка: Внутренний IP:Порт ↔ Внешний IP:Порт. Именно порт позволяет роутеру понять, кому из внутренних устройств вернуть ответ, если все сидят за одним IP.</a:t>
+                      </a:r>
+                      <a:endParaRPr lang="ru-RU" sz="2000">
+                        <a:effectLst/>
+                        <a:latin typeface="Calibri" panose="020F0502020204030204" pitchFamily="34" charset="0"/>
+                        <a:ea typeface="Calibri" panose="020F0502020204030204" pitchFamily="34" charset="0"/>
+                        <a:cs typeface="Times New Roman" panose="02020603050405020304" pitchFamily="18" charset="0"/>
+                      </a:endParaRPr>
+                    </a:p>
+                  </a:txBody>
+                  <a:tcPr marL="9525" marR="9525" marT="9525" marB="9525" anchor="ctr"/>
+                </a:tc>
+              </a:tr>
+              <a:tr h="588855">
+                <a:tc>
+                  <a:txBody>
+                    <a:bodyPr/>
+                    <a:lstStyle/>
+                    <a:p>
+                      <a:pPr algn="just">
+                        <a:lnSpc>
+                          <a:spcPct val="107000"/>
+                        </a:lnSpc>
+                        <a:spcAft>
+                          <a:spcPts val="0"/>
+                        </a:spcAft>
+                      </a:pPr>
+                      <a:r>
+                        <a:rPr lang="ru-RU" sz="2000">
+                          <a:effectLst/>
+                        </a:rPr>
+                        <a:t>Команда в Cisco IOS</a:t>
+                      </a:r>
+                      <a:endParaRPr lang="ru-RU" sz="2000">
+                        <a:effectLst/>
+                        <a:latin typeface="Calibri" panose="020F0502020204030204" pitchFamily="34" charset="0"/>
+                        <a:ea typeface="Calibri" panose="020F0502020204030204" pitchFamily="34" charset="0"/>
+                        <a:cs typeface="Times New Roman" panose="02020603050405020304" pitchFamily="18" charset="0"/>
+                      </a:endParaRPr>
+                    </a:p>
+                  </a:txBody>
+                  <a:tcPr marL="9525" marR="9525" marT="9525" marB="9525" anchor="ctr"/>
+                </a:tc>
+                <a:tc>
+                  <a:txBody>
+                    <a:bodyPr/>
+                    <a:lstStyle/>
+                    <a:p>
+                      <a:pPr algn="just">
+                        <a:lnSpc>
+                          <a:spcPct val="107000"/>
+                        </a:lnSpc>
+                        <a:spcAft>
+                          <a:spcPts val="0"/>
+                        </a:spcAft>
+                      </a:pPr>
+                      <a:r>
+                        <a:rPr lang="en-US" sz="2000" dirty="0" err="1">
+                          <a:effectLst/>
+                        </a:rPr>
+                        <a:t>ip</a:t>
+                      </a:r>
+                      <a:r>
+                        <a:rPr lang="en-US" sz="2000" dirty="0">
+                          <a:effectLst/>
+                        </a:rPr>
+                        <a:t> </a:t>
+                      </a:r>
+                      <a:r>
+                        <a:rPr lang="en-US" sz="2000" dirty="0" err="1">
+                          <a:effectLst/>
+                        </a:rPr>
+                        <a:t>nat</a:t>
+                      </a:r>
+                      <a:r>
+                        <a:rPr lang="en-US" sz="2000" dirty="0">
+                          <a:effectLst/>
+                        </a:rPr>
+                        <a:t> inside source list &lt;ACL&gt; pool &lt;</a:t>
+                      </a:r>
+                      <a:r>
+                        <a:rPr lang="ru-RU" sz="2000" dirty="0" err="1">
+                          <a:effectLst/>
+                        </a:rPr>
+                        <a:t>ИмяПула</a:t>
+                      </a:r>
+                      <a:r>
+                        <a:rPr lang="en-US" sz="2000" dirty="0">
+                          <a:effectLst/>
+                        </a:rPr>
+                        <a:t>&gt;</a:t>
+                      </a:r>
+                      <a:endParaRPr lang="ru-RU" sz="2000" dirty="0">
+                        <a:effectLst/>
+                        <a:latin typeface="Calibri" panose="020F0502020204030204" pitchFamily="34" charset="0"/>
+                        <a:ea typeface="Calibri" panose="020F0502020204030204" pitchFamily="34" charset="0"/>
+                        <a:cs typeface="Times New Roman" panose="02020603050405020304" pitchFamily="18" charset="0"/>
+                      </a:endParaRPr>
+                    </a:p>
+                  </a:txBody>
+                  <a:tcPr marL="9525" marR="9525" marT="9525" marB="9525" anchor="ctr"/>
+                </a:tc>
+                <a:tc>
+                  <a:txBody>
+                    <a:bodyPr/>
+                    <a:lstStyle/>
+                    <a:p>
+                      <a:pPr algn="just">
+                        <a:lnSpc>
+                          <a:spcPct val="107000"/>
+                        </a:lnSpc>
+                        <a:spcAft>
+                          <a:spcPts val="0"/>
+                        </a:spcAft>
+                      </a:pPr>
+                      <a:r>
+                        <a:rPr lang="en-US" sz="2000" dirty="0" err="1">
+                          <a:effectLst/>
+                        </a:rPr>
+                        <a:t>ip</a:t>
+                      </a:r>
+                      <a:r>
+                        <a:rPr lang="en-US" sz="2000" dirty="0">
+                          <a:effectLst/>
+                        </a:rPr>
+                        <a:t> </a:t>
+                      </a:r>
+                      <a:r>
+                        <a:rPr lang="en-US" sz="2000" dirty="0" err="1">
+                          <a:effectLst/>
+                        </a:rPr>
+                        <a:t>nat</a:t>
+                      </a:r>
+                      <a:r>
+                        <a:rPr lang="en-US" sz="2000" dirty="0">
+                          <a:effectLst/>
+                        </a:rPr>
+                        <a:t> inside source list &lt;ACL&gt; interface &lt;</a:t>
+                      </a:r>
+                      <a:r>
+                        <a:rPr lang="ru-RU" sz="2000" dirty="0">
+                          <a:effectLst/>
+                        </a:rPr>
+                        <a:t>Интерфейс</a:t>
+                      </a:r>
+                      <a:r>
+                        <a:rPr lang="en-US" sz="2000" dirty="0">
+                          <a:effectLst/>
+                        </a:rPr>
+                        <a:t>&gt; overload</a:t>
+                      </a:r>
+                      <a:endParaRPr lang="ru-RU" sz="2000" dirty="0">
+                        <a:effectLst/>
+                        <a:latin typeface="Calibri" panose="020F0502020204030204" pitchFamily="34" charset="0"/>
+                        <a:ea typeface="Calibri" panose="020F0502020204030204" pitchFamily="34" charset="0"/>
+                        <a:cs typeface="Times New Roman" panose="02020603050405020304" pitchFamily="18" charset="0"/>
+                      </a:endParaRPr>
+                    </a:p>
+                  </a:txBody>
+                  <a:tcPr marL="9525" marR="9525" marT="9525" marB="9525" anchor="ctr"/>
+                </a:tc>
+              </a:tr>
+            </a:tbl>
+          </a:graphicData>
+        </a:graphic>
+      </p:graphicFrame>
+    </p:spTree>
+    <p:extLst>
+      <p:ext uri="{BB962C8B-B14F-4D97-AF65-F5344CB8AC3E}">
+        <p14:creationId xmlns:p14="http://schemas.microsoft.com/office/powerpoint/2010/main" val="2091819756"/>
+      </p:ext>
+    </p:extLst>
+  </p:cSld>
+  <p:clrMapOvr>
+    <a:masterClrMapping/>
+  </p:clrMapOvr>
+</p:sld>
+</file>
+
+<file path=ppt/slides/slide7.xml><?xml version="1.0" encoding="utf-8"?>
+<p:sld xmlns:a="http://schemas.openxmlformats.org/drawingml/2006/main" xmlns:r="http://schemas.openxmlformats.org/officeDocument/2006/relationships" xmlns:p="http://schemas.openxmlformats.org/presentationml/2006/main">
+  <p:cSld>
+    <p:spTree>
+      <p:nvGrpSpPr>
+        <p:cNvPr id="1" name=""/>
+        <p:cNvGrpSpPr/>
+        <p:nvPr/>
+      </p:nvGrpSpPr>
+      <p:grpSpPr>
+        <a:xfrm>
+          <a:off x="0" y="0"/>
+          <a:ext cx="0" cy="0"/>
+          <a:chOff x="0" y="0"/>
+          <a:chExt cx="0" cy="0"/>
+        </a:xfrm>
+      </p:grpSpPr>
+      <p:pic>
+        <p:nvPicPr>
+          <p:cNvPr id="2" name="Рисунок 1"/>
+          <p:cNvPicPr>
+            <a:picLocks noChangeAspect="1"/>
+          </p:cNvPicPr>
+          <p:nvPr/>
+        </p:nvPicPr>
+        <p:blipFill>
+          <a:blip r:embed="rId2"/>
+          <a:stretch>
+            <a:fillRect/>
+          </a:stretch>
+        </p:blipFill>
+        <p:spPr>
+          <a:xfrm>
+            <a:off x="6918960" y="2057399"/>
+            <a:ext cx="5273040" cy="3385161"/>
+          </a:xfrm>
+          <a:prstGeom prst="rect">
+            <a:avLst/>
+          </a:prstGeom>
+        </p:spPr>
+      </p:pic>
+      <p:sp>
+        <p:nvSpPr>
+          <p:cNvPr id="4" name="Прямоугольник 3"/>
+          <p:cNvSpPr/>
+          <p:nvPr/>
+        </p:nvSpPr>
+        <p:spPr>
+          <a:xfrm>
+            <a:off x="0" y="1502688"/>
+            <a:ext cx="6918960" cy="5355312"/>
+          </a:xfrm>
+          <a:prstGeom prst="rect">
+            <a:avLst/>
+          </a:prstGeom>
+        </p:spPr>
+        <p:txBody>
+          <a:bodyPr wrap="square">
+            <a:spAutoFit/>
+          </a:bodyPr>
+          <a:lstStyle/>
+          <a:p>
+            <a:pPr algn="just"/>
+            <a:r>
+              <a:rPr lang="ru-RU" dirty="0" smtClean="0">
+                <a:latin typeface="Times New Roman" panose="02020603050405020304" pitchFamily="18" charset="0"/>
+                <a:cs typeface="Times New Roman" panose="02020603050405020304" pitchFamily="18" charset="0"/>
+              </a:rPr>
+              <a:t>и </a:t>
+            </a:r>
+            <a:r>
+              <a:rPr lang="ru-RU" dirty="0">
+                <a:latin typeface="Times New Roman" panose="02020603050405020304" pitchFamily="18" charset="0"/>
+                <a:cs typeface="Times New Roman" panose="02020603050405020304" pitchFamily="18" charset="0"/>
+              </a:rPr>
+              <a:t>предоставляет HTTP‑сервис для проверки сквозной связности.</a:t>
+            </a:r>
+          </a:p>
+          <a:p>
+            <a:pPr algn="just"/>
+            <a:r>
+              <a:rPr lang="ru-RU" dirty="0">
+                <a:latin typeface="Times New Roman" panose="02020603050405020304" pitchFamily="18" charset="0"/>
+                <a:cs typeface="Times New Roman" panose="02020603050405020304" pitchFamily="18" charset="0"/>
+              </a:rPr>
+              <a:t>Передача данных между приватной сетью и внешним сегментом строится на статических маршрутах, явно указывающих направление трафика. На </a:t>
+            </a:r>
+            <a:r>
+              <a:rPr lang="ru-RU" dirty="0" err="1">
+                <a:latin typeface="Times New Roman" panose="02020603050405020304" pitchFamily="18" charset="0"/>
+                <a:cs typeface="Times New Roman" panose="02020603050405020304" pitchFamily="18" charset="0"/>
+              </a:rPr>
+              <a:t>Router_LAN</a:t>
+            </a:r>
+            <a:r>
+              <a:rPr lang="ru-RU" dirty="0">
+                <a:latin typeface="Times New Roman" panose="02020603050405020304" pitchFamily="18" charset="0"/>
+                <a:cs typeface="Times New Roman" panose="02020603050405020304" pitchFamily="18" charset="0"/>
+              </a:rPr>
+              <a:t> настроен маршрут по умолчанию, перенаправляющий весь внешний трафик на интерфейс, ведущий к </a:t>
+            </a:r>
+            <a:r>
+              <a:rPr lang="ru-RU" dirty="0" err="1">
+                <a:latin typeface="Times New Roman" panose="02020603050405020304" pitchFamily="18" charset="0"/>
+                <a:cs typeface="Times New Roman" panose="02020603050405020304" pitchFamily="18" charset="0"/>
+              </a:rPr>
+              <a:t>Router_Internet</a:t>
+            </a:r>
+            <a:r>
+              <a:rPr lang="ru-RU" dirty="0">
+                <a:latin typeface="Times New Roman" panose="02020603050405020304" pitchFamily="18" charset="0"/>
+                <a:cs typeface="Times New Roman" panose="02020603050405020304" pitchFamily="18" charset="0"/>
+              </a:rPr>
+              <a:t>. В свою очередь, </a:t>
+            </a:r>
+            <a:r>
+              <a:rPr lang="ru-RU" dirty="0" err="1">
+                <a:latin typeface="Times New Roman" panose="02020603050405020304" pitchFamily="18" charset="0"/>
+                <a:cs typeface="Times New Roman" panose="02020603050405020304" pitchFamily="18" charset="0"/>
+              </a:rPr>
+              <a:t>Router_Internet</a:t>
+            </a:r>
+            <a:r>
+              <a:rPr lang="ru-RU" dirty="0">
+                <a:latin typeface="Times New Roman" panose="02020603050405020304" pitchFamily="18" charset="0"/>
+                <a:cs typeface="Times New Roman" panose="02020603050405020304" pitchFamily="18" charset="0"/>
+              </a:rPr>
+              <a:t> содержит статическую запись о расположении сети 192.168.1.0/24, что позволяет возвращать ответные пакеты в локальную сеть. Такая схема гарантирует предсказуемую доставку трафика без использования динамических протоколов маршрутизации.</a:t>
+            </a:r>
+          </a:p>
+          <a:p>
+            <a:pPr algn="just"/>
+            <a:r>
+              <a:rPr lang="ru-RU" dirty="0">
+                <a:latin typeface="Times New Roman" panose="02020603050405020304" pitchFamily="18" charset="0"/>
+                <a:cs typeface="Times New Roman" panose="02020603050405020304" pitchFamily="18" charset="0"/>
+              </a:rPr>
+              <a:t>Для выхода в публичный сегмент применяется PAT, позволяющий множеству устройств использовать один внешний IP‑адрес. При отправке трафика </a:t>
+            </a:r>
+            <a:r>
+              <a:rPr lang="ru-RU" dirty="0" err="1">
+                <a:latin typeface="Times New Roman" panose="02020603050405020304" pitchFamily="18" charset="0"/>
+                <a:cs typeface="Times New Roman" panose="02020603050405020304" pitchFamily="18" charset="0"/>
+              </a:rPr>
+              <a:t>Router_LAN</a:t>
+            </a:r>
+            <a:r>
+              <a:rPr lang="ru-RU" dirty="0">
+                <a:latin typeface="Times New Roman" panose="02020603050405020304" pitchFamily="18" charset="0"/>
+                <a:cs typeface="Times New Roman" panose="02020603050405020304" pitchFamily="18" charset="0"/>
+              </a:rPr>
+              <a:t> заменяет внутренние адреса компьютеров на адрес своего WAN‑интерфейса, дополняя каждый сеанс уникальным портом. Это обеспечивает однозначное сопоставление обратных ответов и позволяет трём компьютерам одновременно взаимодействовать с сервером, оставаясь скрытыми за одним публичным адресом</a:t>
+            </a:r>
+            <a:r>
+              <a:rPr lang="ru-RU" dirty="0" smtClean="0">
+                <a:latin typeface="Times New Roman" panose="02020603050405020304" pitchFamily="18" charset="0"/>
+                <a:cs typeface="Times New Roman" panose="02020603050405020304" pitchFamily="18" charset="0"/>
+              </a:rPr>
+              <a:t>.</a:t>
+            </a:r>
+            <a:endParaRPr lang="ru-RU" dirty="0">
+              <a:latin typeface="Times New Roman" panose="02020603050405020304" pitchFamily="18" charset="0"/>
+              <a:cs typeface="Times New Roman" panose="02020603050405020304" pitchFamily="18" charset="0"/>
+            </a:endParaRPr>
+          </a:p>
+        </p:txBody>
+      </p:sp>
+      <p:sp>
+        <p:nvSpPr>
+          <p:cNvPr id="5" name="Прямоугольник 4"/>
+          <p:cNvSpPr/>
+          <p:nvPr/>
+        </p:nvSpPr>
+        <p:spPr>
+          <a:xfrm>
+            <a:off x="0" y="0"/>
+            <a:ext cx="12192000" cy="1477328"/>
+          </a:xfrm>
+          <a:prstGeom prst="rect">
+            <a:avLst/>
+          </a:prstGeom>
+        </p:spPr>
+        <p:txBody>
+          <a:bodyPr wrap="square">
+            <a:spAutoFit/>
+          </a:bodyPr>
+          <a:lstStyle/>
+          <a:p>
+            <a:pPr algn="just"/>
+            <a:r>
+              <a:rPr lang="ru-RU" dirty="0">
+                <a:latin typeface="Times New Roman" panose="02020603050405020304" pitchFamily="18" charset="0"/>
+                <a:cs typeface="Times New Roman" panose="02020603050405020304" pitchFamily="18" charset="0"/>
+              </a:rPr>
+              <a:t>В модели реализована сегментированная сеть с выделенной локальной зоной и внешним сегментом, имитирующим интернет. Три компьютера объединены в приватную подсеть 192.168.1.0/24 под управлением </a:t>
+            </a:r>
+            <a:r>
+              <a:rPr lang="ru-RU" dirty="0" err="1">
+                <a:latin typeface="Times New Roman" panose="02020603050405020304" pitchFamily="18" charset="0"/>
+                <a:cs typeface="Times New Roman" panose="02020603050405020304" pitchFamily="18" charset="0"/>
+              </a:rPr>
+              <a:t>Router_LAN</a:t>
+            </a:r>
+            <a:r>
+              <a:rPr lang="ru-RU" dirty="0">
+                <a:latin typeface="Times New Roman" panose="02020603050405020304" pitchFamily="18" charset="0"/>
+                <a:cs typeface="Times New Roman" panose="02020603050405020304" pitchFamily="18" charset="0"/>
+              </a:rPr>
+              <a:t>, который одновременно выполняет функции шлюза и транслятора адресов. Второй роутер, </a:t>
+            </a:r>
+            <a:r>
+              <a:rPr lang="ru-RU" dirty="0" err="1">
+                <a:latin typeface="Times New Roman" panose="02020603050405020304" pitchFamily="18" charset="0"/>
+                <a:cs typeface="Times New Roman" panose="02020603050405020304" pitchFamily="18" charset="0"/>
+              </a:rPr>
+              <a:t>Router_Internet</a:t>
+            </a:r>
+            <a:r>
+              <a:rPr lang="ru-RU" dirty="0">
+                <a:latin typeface="Times New Roman" panose="02020603050405020304" pitchFamily="18" charset="0"/>
+                <a:cs typeface="Times New Roman" panose="02020603050405020304" pitchFamily="18" charset="0"/>
+              </a:rPr>
+              <a:t>, выступает транзитным узлом к публичному ресурсу и обеспечивает маршрутизацию трафика между сегментами. Сервер размещён в отдельном стыковом сегменте и предоставляет HTTP‑сервис для проверки сквозной связности.</a:t>
+            </a:r>
+            <a:endParaRPr lang="ru-RU" dirty="0">
+              <a:latin typeface="Times New Roman" panose="02020603050405020304" pitchFamily="18" charset="0"/>
+              <a:cs typeface="Times New Roman" panose="02020603050405020304" pitchFamily="18" charset="0"/>
+            </a:endParaRPr>
+          </a:p>
+        </p:txBody>
+      </p:sp>
+    </p:spTree>
+    <p:extLst>
+      <p:ext uri="{BB962C8B-B14F-4D97-AF65-F5344CB8AC3E}">
+        <p14:creationId xmlns:p14="http://schemas.microsoft.com/office/powerpoint/2010/main" val="3568571375"/>
+      </p:ext>
+    </p:extLst>
+  </p:cSld>
+  <p:clrMapOvr>
+    <a:masterClrMapping/>
+  </p:clrMapOvr>
+</p:sld>
+</file>
+
+<file path=ppt/slides/slide8.xml><?xml version="1.0" encoding="utf-8"?>
+<p:sld xmlns:a="http://schemas.openxmlformats.org/drawingml/2006/main" xmlns:r="http://schemas.openxmlformats.org/officeDocument/2006/relationships" xmlns:p="http://schemas.openxmlformats.org/presentationml/2006/main">
+  <p:cSld>
+    <p:spTree>
+      <p:nvGrpSpPr>
+        <p:cNvPr id="1" name=""/>
+        <p:cNvGrpSpPr/>
+        <p:nvPr/>
+      </p:nvGrpSpPr>
+      <p:grpSpPr>
+        <a:xfrm>
+          <a:off x="0" y="0"/>
+          <a:ext cx="0" cy="0"/>
+          <a:chOff x="0" y="0"/>
+          <a:chExt cx="0" cy="0"/>
+        </a:xfrm>
+      </p:grpSpPr>
+      <p:pic>
+        <p:nvPicPr>
+          <p:cNvPr id="3" name="Рисунок 2"/>
+          <p:cNvPicPr>
+            <a:picLocks noChangeAspect="1"/>
+          </p:cNvPicPr>
+          <p:nvPr/>
+        </p:nvPicPr>
+        <p:blipFill>
+          <a:blip r:embed="rId2"/>
+          <a:stretch>
+            <a:fillRect/>
+          </a:stretch>
+        </p:blipFill>
+        <p:spPr>
+          <a:xfrm>
+            <a:off x="7056120" y="3368908"/>
+            <a:ext cx="5135880" cy="2362200"/>
+          </a:xfrm>
+          <a:prstGeom prst="rect">
+            <a:avLst/>
+          </a:prstGeom>
+        </p:spPr>
+      </p:pic>
+      <p:sp>
+        <p:nvSpPr>
+          <p:cNvPr id="4" name="Прямоугольник 3"/>
+          <p:cNvSpPr/>
+          <p:nvPr/>
+        </p:nvSpPr>
+        <p:spPr>
+          <a:xfrm>
+            <a:off x="0" y="2123658"/>
+            <a:ext cx="7056120" cy="4708981"/>
+          </a:xfrm>
+          <a:prstGeom prst="rect">
+            <a:avLst/>
+          </a:prstGeom>
+        </p:spPr>
+        <p:txBody>
+          <a:bodyPr wrap="square">
+            <a:spAutoFit/>
+          </a:bodyPr>
+          <a:lstStyle/>
+          <a:p>
+            <a:pPr algn="just"/>
+            <a:r>
+              <a:rPr lang="ru-RU" sz="2000" dirty="0" smtClean="0">
+                <a:latin typeface="Times New Roman" panose="02020603050405020304" pitchFamily="18" charset="0"/>
+                <a:cs typeface="Times New Roman" panose="02020603050405020304" pitchFamily="18" charset="0"/>
+              </a:rPr>
+              <a:t>Корректная </a:t>
+            </a:r>
+            <a:r>
+              <a:rPr lang="ru-RU" sz="2000" dirty="0">
+                <a:latin typeface="Times New Roman" panose="02020603050405020304" pitchFamily="18" charset="0"/>
+                <a:cs typeface="Times New Roman" panose="02020603050405020304" pitchFamily="18" charset="0"/>
+              </a:rPr>
+              <a:t>работа PAT напрямую зависит от правильной разметки интерфейсов как </a:t>
+            </a:r>
+            <a:r>
+              <a:rPr lang="ru-RU" sz="2000" dirty="0" err="1">
+                <a:latin typeface="Times New Roman" panose="02020603050405020304" pitchFamily="18" charset="0"/>
+                <a:cs typeface="Times New Roman" panose="02020603050405020304" pitchFamily="18" charset="0"/>
+              </a:rPr>
+              <a:t>inside</a:t>
+            </a:r>
+            <a:r>
+              <a:rPr lang="ru-RU" sz="2000" dirty="0">
+                <a:latin typeface="Times New Roman" panose="02020603050405020304" pitchFamily="18" charset="0"/>
+                <a:cs typeface="Times New Roman" panose="02020603050405020304" pitchFamily="18" charset="0"/>
+              </a:rPr>
+              <a:t> и </a:t>
+            </a:r>
+            <a:r>
+              <a:rPr lang="ru-RU" sz="2000" dirty="0" err="1">
+                <a:latin typeface="Times New Roman" panose="02020603050405020304" pitchFamily="18" charset="0"/>
+                <a:cs typeface="Times New Roman" panose="02020603050405020304" pitchFamily="18" charset="0"/>
+              </a:rPr>
+              <a:t>outside</a:t>
+            </a:r>
+            <a:r>
+              <a:rPr lang="ru-RU" sz="2000" dirty="0">
+                <a:latin typeface="Times New Roman" panose="02020603050405020304" pitchFamily="18" charset="0"/>
+                <a:cs typeface="Times New Roman" panose="02020603050405020304" pitchFamily="18" charset="0"/>
+              </a:rPr>
+              <a:t>, определяющей направление трансляции адресов. Список доступа (ACL) ограничивает область действия NAT, разрешая трансляцию только для узлов локальной сети. Это предотвращает случайное преобразование трафика из других сегментов и повышает управляемость и безопасность конфигурации.</a:t>
+            </a:r>
+          </a:p>
+          <a:p>
+            <a:pPr algn="just"/>
+            <a:r>
+              <a:rPr lang="ru-RU" sz="2000" dirty="0">
+                <a:latin typeface="Times New Roman" panose="02020603050405020304" pitchFamily="18" charset="0"/>
+                <a:cs typeface="Times New Roman" panose="02020603050405020304" pitchFamily="18" charset="0"/>
+              </a:rPr>
+              <a:t>Представленная модель отражает типовую архитектуру домашних и небольших офисных сетей, где единый публичный IP используется всеми внутренними устройствами. Настройка статической маршрутизации и PAT в </a:t>
+            </a:r>
+            <a:r>
+              <a:rPr lang="ru-RU" sz="2000" dirty="0" err="1">
+                <a:latin typeface="Times New Roman" panose="02020603050405020304" pitchFamily="18" charset="0"/>
+                <a:cs typeface="Times New Roman" panose="02020603050405020304" pitchFamily="18" charset="0"/>
+              </a:rPr>
+              <a:t>Packet</a:t>
+            </a:r>
+            <a:r>
+              <a:rPr lang="ru-RU" sz="2000" dirty="0">
+                <a:latin typeface="Times New Roman" panose="02020603050405020304" pitchFamily="18" charset="0"/>
+                <a:cs typeface="Times New Roman" panose="02020603050405020304" pitchFamily="18" charset="0"/>
+              </a:rPr>
+              <a:t> </a:t>
+            </a:r>
+            <a:r>
+              <a:rPr lang="ru-RU" sz="2000" dirty="0" err="1">
+                <a:latin typeface="Times New Roman" panose="02020603050405020304" pitchFamily="18" charset="0"/>
+                <a:cs typeface="Times New Roman" panose="02020603050405020304" pitchFamily="18" charset="0"/>
+              </a:rPr>
+              <a:t>Tracer</a:t>
+            </a:r>
+            <a:r>
+              <a:rPr lang="ru-RU" sz="2000" dirty="0">
+                <a:latin typeface="Times New Roman" panose="02020603050405020304" pitchFamily="18" charset="0"/>
+                <a:cs typeface="Times New Roman" panose="02020603050405020304" pitchFamily="18" charset="0"/>
+              </a:rPr>
+              <a:t> позволяет наглядно изучить принципы межсетевого взаимодействия, понять логику таблиц маршрутизации и NAT, а также освоить методы диагностики связности, применимые в реальных сетевых инфраструктурах.</a:t>
+            </a:r>
+            <a:endParaRPr lang="ru-RU" sz="2000" dirty="0">
+              <a:latin typeface="Times New Roman" panose="02020603050405020304" pitchFamily="18" charset="0"/>
+              <a:cs typeface="Times New Roman" panose="02020603050405020304" pitchFamily="18" charset="0"/>
+            </a:endParaRPr>
+          </a:p>
+        </p:txBody>
+      </p:sp>
+      <p:sp>
+        <p:nvSpPr>
+          <p:cNvPr id="5" name="Прямоугольник 4"/>
+          <p:cNvSpPr/>
+          <p:nvPr/>
+        </p:nvSpPr>
+        <p:spPr>
+          <a:xfrm>
+            <a:off x="0" y="0"/>
+            <a:ext cx="12192000" cy="2123658"/>
+          </a:xfrm>
+          <a:prstGeom prst="rect">
+            <a:avLst/>
+          </a:prstGeom>
+        </p:spPr>
+        <p:txBody>
+          <a:bodyPr wrap="square">
+            <a:spAutoFit/>
+          </a:bodyPr>
+          <a:lstStyle/>
+          <a:p>
+            <a:pPr algn="just"/>
+            <a:r>
+              <a:rPr lang="ru-RU" sz="2200" dirty="0">
+                <a:latin typeface="Times New Roman" panose="02020603050405020304" pitchFamily="18" charset="0"/>
+                <a:cs typeface="Times New Roman" panose="02020603050405020304" pitchFamily="18" charset="0"/>
+              </a:rPr>
+              <a:t>Когда все три компьютера одновременно отправляют ICMP‑запросы к серверу, каждый пакет проходит процедуру трансляции на </a:t>
+            </a:r>
+            <a:r>
+              <a:rPr lang="ru-RU" sz="2200" dirty="0" err="1">
+                <a:latin typeface="Times New Roman" panose="02020603050405020304" pitchFamily="18" charset="0"/>
+                <a:cs typeface="Times New Roman" panose="02020603050405020304" pitchFamily="18" charset="0"/>
+              </a:rPr>
+              <a:t>Router_LAN</a:t>
+            </a:r>
+            <a:r>
+              <a:rPr lang="ru-RU" sz="2200" dirty="0">
+                <a:latin typeface="Times New Roman" panose="02020603050405020304" pitchFamily="18" charset="0"/>
+                <a:cs typeface="Times New Roman" panose="02020603050405020304" pitchFamily="18" charset="0"/>
+              </a:rPr>
+              <a:t> с присвоением индивидуального порта. Трафик передаётся через </a:t>
+            </a:r>
+            <a:r>
+              <a:rPr lang="ru-RU" sz="2200" dirty="0" err="1">
+                <a:latin typeface="Times New Roman" panose="02020603050405020304" pitchFamily="18" charset="0"/>
+                <a:cs typeface="Times New Roman" panose="02020603050405020304" pitchFamily="18" charset="0"/>
+              </a:rPr>
+              <a:t>Router_Internet</a:t>
+            </a:r>
+            <a:r>
+              <a:rPr lang="ru-RU" sz="2200" dirty="0">
+                <a:latin typeface="Times New Roman" panose="02020603050405020304" pitchFamily="18" charset="0"/>
+                <a:cs typeface="Times New Roman" panose="02020603050405020304" pitchFamily="18" charset="0"/>
+              </a:rPr>
+              <a:t> к серверу, который формирует ответы на внешний адрес роутера. При получении ответов </a:t>
+            </a:r>
+            <a:r>
+              <a:rPr lang="ru-RU" sz="2200" dirty="0" err="1">
+                <a:latin typeface="Times New Roman" panose="02020603050405020304" pitchFamily="18" charset="0"/>
+                <a:cs typeface="Times New Roman" panose="02020603050405020304" pitchFamily="18" charset="0"/>
+              </a:rPr>
+              <a:t>Router_LAN</a:t>
+            </a:r>
+            <a:r>
+              <a:rPr lang="ru-RU" sz="2200" dirty="0">
+                <a:latin typeface="Times New Roman" panose="02020603050405020304" pitchFamily="18" charset="0"/>
+                <a:cs typeface="Times New Roman" panose="02020603050405020304" pitchFamily="18" charset="0"/>
+              </a:rPr>
+              <a:t> анализирует порты и корректно перенаправляет пакеты соответствующим компьютерам. Таким образом, одновременные сеансы не конфликтуют и обслуживаются независимо друг от друга.</a:t>
+            </a:r>
+            <a:endParaRPr lang="ru-RU" sz="2200" dirty="0">
+              <a:latin typeface="Times New Roman" panose="02020603050405020304" pitchFamily="18" charset="0"/>
+              <a:cs typeface="Times New Roman" panose="02020603050405020304" pitchFamily="18" charset="0"/>
+            </a:endParaRPr>
+          </a:p>
+        </p:txBody>
+      </p:sp>
+    </p:spTree>
+    <p:extLst>
+      <p:ext uri="{BB962C8B-B14F-4D97-AF65-F5344CB8AC3E}">
+        <p14:creationId xmlns:p14="http://schemas.microsoft.com/office/powerpoint/2010/main" val="3185226927"/>
+      </p:ext>
+    </p:extLst>
   </p:cSld>
   <p:clrMapOvr>
     <a:masterClrMapping/>
@@ -3942,7 +5731,7 @@
   <a:extraClrSchemeLst/>
   <a:extLst>
     <a:ext uri="{05A4C25C-085E-4340-85A3-A5531E510DB2}">
-      <thm15:themeFamily xmlns="" xmlns:thm15="http://schemas.microsoft.com/office/thememl/2012/main" name="Office Theme" id="{62F939B6-93AF-4DB8-9C6B-D6C7DFDC589F}" vid="{4A3C46E8-61CC-4603-A589-7422A47A8E4A}"/>
+      <thm15:themeFamily xmlns:thm15="http://schemas.microsoft.com/office/thememl/2012/main" name="Office Theme" id="{62F939B6-93AF-4DB8-9C6B-D6C7DFDC589F}" vid="{4A3C46E8-61CC-4603-A589-7422A47A8E4A}"/>
     </a:ext>
   </a:extLst>
 </a:theme>
